--- a/public/videos/repositories/vr-content-gear-guide/vr-content-gear-guide-tech-preview.pptx
+++ b/public/videos/repositories/vr-content-gear-guide/vr-content-gear-guide-tech-preview.pptx
@@ -134,7 +134,7 @@
           <p:cNvPr id="2" name="タイトル 1">
             <a:extLst>
               <a:ext uri="{FF2B5EF4-FFF2-40B4-BE49-F238E27FC236}">
-                <a16:creationId xmlns:a16="http://schemas.microsoft.com/office/drawing/2014/main" id="{DB5F4845-B403-D8B6-4B5B-F254A481FA65}"/>
+                <a16:creationId xmlns:a16="http://schemas.microsoft.com/office/drawing/2014/main" id="{C8EB39C1-D6DE-36EC-150E-BCF8B296D2CA}"/>
               </a:ext>
             </a:extLst>
           </p:cNvPr>
@@ -171,7 +171,7 @@
           <p:cNvPr id="3" name="字幕 2">
             <a:extLst>
               <a:ext uri="{FF2B5EF4-FFF2-40B4-BE49-F238E27FC236}">
-                <a16:creationId xmlns:a16="http://schemas.microsoft.com/office/drawing/2014/main" id="{B006C3A2-314A-6E61-74EE-90C2D312C71C}"/>
+                <a16:creationId xmlns:a16="http://schemas.microsoft.com/office/drawing/2014/main" id="{BD8BB1FF-0EEA-D35C-A8D0-2E3913FC5557}"/>
               </a:ext>
             </a:extLst>
           </p:cNvPr>
@@ -241,7 +241,7 @@
           <p:cNvPr id="4" name="日付プレースホルダー 3">
             <a:extLst>
               <a:ext uri="{FF2B5EF4-FFF2-40B4-BE49-F238E27FC236}">
-                <a16:creationId xmlns:a16="http://schemas.microsoft.com/office/drawing/2014/main" id="{D66C4AD3-22D6-E78C-D040-7BFFA1AAED69}"/>
+                <a16:creationId xmlns:a16="http://schemas.microsoft.com/office/drawing/2014/main" id="{8D756399-1D5C-6CFA-374A-BF389BDE8C30}"/>
               </a:ext>
             </a:extLst>
           </p:cNvPr>
@@ -257,7 +257,7 @@
           <a:bodyPr/>
           <a:lstStyle/>
           <a:p>
-            <a:fld id="{01E49689-CFB7-41ED-B10D-644F9472EC4B}" type="datetimeFigureOut">
+            <a:fld id="{E0067E29-33DB-46FA-A4BF-55C2424EE3F1}" type="datetimeFigureOut">
               <a:rPr kumimoji="1" lang="ja-JP" altLang="en-US" smtClean="0"/>
               <a:t>2026/7/30</a:t>
             </a:fld>
@@ -270,7 +270,7 @@
           <p:cNvPr id="5" name="フッター プレースホルダー 4">
             <a:extLst>
               <a:ext uri="{FF2B5EF4-FFF2-40B4-BE49-F238E27FC236}">
-                <a16:creationId xmlns:a16="http://schemas.microsoft.com/office/drawing/2014/main" id="{1323DA79-6B6F-33CC-795B-4AC46D70EF89}"/>
+                <a16:creationId xmlns:a16="http://schemas.microsoft.com/office/drawing/2014/main" id="{12F10137-5846-A261-EC37-F002306A7090}"/>
               </a:ext>
             </a:extLst>
           </p:cNvPr>
@@ -295,7 +295,7 @@
           <p:cNvPr id="6" name="スライド番号プレースホルダー 5">
             <a:extLst>
               <a:ext uri="{FF2B5EF4-FFF2-40B4-BE49-F238E27FC236}">
-                <a16:creationId xmlns:a16="http://schemas.microsoft.com/office/drawing/2014/main" id="{C72B2FAB-AB65-E216-4979-E9E40A8A399E}"/>
+                <a16:creationId xmlns:a16="http://schemas.microsoft.com/office/drawing/2014/main" id="{E835A9F2-205A-A969-AFAF-EC7C265E9066}"/>
               </a:ext>
             </a:extLst>
           </p:cNvPr>
@@ -311,7 +311,7 @@
           <a:bodyPr/>
           <a:lstStyle/>
           <a:p>
-            <a:fld id="{83E7A7C4-7FBC-467C-B688-FCCB2757B01F}" type="slidenum">
+            <a:fld id="{C0D520E9-7B49-49BF-B12B-E685C26A66D8}" type="slidenum">
               <a:rPr kumimoji="1" lang="ja-JP" altLang="en-US" smtClean="0"/>
               <a:t>‹#›</a:t>
             </a:fld>
@@ -322,7 +322,7 @@
     </p:spTree>
     <p:extLst>
       <p:ext uri="{BB962C8B-B14F-4D97-AF65-F5344CB8AC3E}">
-        <p14:creationId xmlns:p14="http://schemas.microsoft.com/office/powerpoint/2010/main" val="4279688185"/>
+        <p14:creationId xmlns:p14="http://schemas.microsoft.com/office/powerpoint/2010/main" val="1693979667"/>
       </p:ext>
     </p:extLst>
   </p:cSld>
@@ -354,7 +354,7 @@
           <p:cNvPr id="2" name="タイトル 1">
             <a:extLst>
               <a:ext uri="{FF2B5EF4-FFF2-40B4-BE49-F238E27FC236}">
-                <a16:creationId xmlns:a16="http://schemas.microsoft.com/office/drawing/2014/main" id="{B4071CD4-F705-070F-B79B-AEAF3B337034}"/>
+                <a16:creationId xmlns:a16="http://schemas.microsoft.com/office/drawing/2014/main" id="{FE26DB60-CE24-8AF2-9E89-96602B74AB56}"/>
               </a:ext>
             </a:extLst>
           </p:cNvPr>
@@ -382,7 +382,7 @@
           <p:cNvPr id="3" name="縦書きテキスト プレースホルダー 2">
             <a:extLst>
               <a:ext uri="{FF2B5EF4-FFF2-40B4-BE49-F238E27FC236}">
-                <a16:creationId xmlns:a16="http://schemas.microsoft.com/office/drawing/2014/main" id="{E803FEF2-5CC4-9B0D-3458-7810C66BF816}"/>
+                <a16:creationId xmlns:a16="http://schemas.microsoft.com/office/drawing/2014/main" id="{07EAA9F2-0ECE-0CD9-23BA-AA15DE95A30F}"/>
               </a:ext>
             </a:extLst>
           </p:cNvPr>
@@ -471,7 +471,7 @@
           <p:cNvPr id="4" name="日付プレースホルダー 3">
             <a:extLst>
               <a:ext uri="{FF2B5EF4-FFF2-40B4-BE49-F238E27FC236}">
-                <a16:creationId xmlns:a16="http://schemas.microsoft.com/office/drawing/2014/main" id="{AAD73304-8854-C009-B9A5-21AC3C67E981}"/>
+                <a16:creationId xmlns:a16="http://schemas.microsoft.com/office/drawing/2014/main" id="{64881B4D-C402-8CA9-0C96-705B379A258D}"/>
               </a:ext>
             </a:extLst>
           </p:cNvPr>
@@ -487,7 +487,7 @@
           <a:bodyPr/>
           <a:lstStyle/>
           <a:p>
-            <a:fld id="{01E49689-CFB7-41ED-B10D-644F9472EC4B}" type="datetimeFigureOut">
+            <a:fld id="{E0067E29-33DB-46FA-A4BF-55C2424EE3F1}" type="datetimeFigureOut">
               <a:rPr kumimoji="1" lang="ja-JP" altLang="en-US" smtClean="0"/>
               <a:t>2026/7/30</a:t>
             </a:fld>
@@ -500,7 +500,7 @@
           <p:cNvPr id="5" name="フッター プレースホルダー 4">
             <a:extLst>
               <a:ext uri="{FF2B5EF4-FFF2-40B4-BE49-F238E27FC236}">
-                <a16:creationId xmlns:a16="http://schemas.microsoft.com/office/drawing/2014/main" id="{C03FEE16-ABB4-93C4-1FA9-6156E340CAA4}"/>
+                <a16:creationId xmlns:a16="http://schemas.microsoft.com/office/drawing/2014/main" id="{529DE68A-0B20-2CB2-8D1A-37C7B635B793}"/>
               </a:ext>
             </a:extLst>
           </p:cNvPr>
@@ -525,7 +525,7 @@
           <p:cNvPr id="6" name="スライド番号プレースホルダー 5">
             <a:extLst>
               <a:ext uri="{FF2B5EF4-FFF2-40B4-BE49-F238E27FC236}">
-                <a16:creationId xmlns:a16="http://schemas.microsoft.com/office/drawing/2014/main" id="{1D8405DF-71E2-9100-11EA-D4B394583B2B}"/>
+                <a16:creationId xmlns:a16="http://schemas.microsoft.com/office/drawing/2014/main" id="{BC561D9F-870F-DA26-101B-2BF035CEB4DD}"/>
               </a:ext>
             </a:extLst>
           </p:cNvPr>
@@ -541,7 +541,7 @@
           <a:bodyPr/>
           <a:lstStyle/>
           <a:p>
-            <a:fld id="{83E7A7C4-7FBC-467C-B688-FCCB2757B01F}" type="slidenum">
+            <a:fld id="{C0D520E9-7B49-49BF-B12B-E685C26A66D8}" type="slidenum">
               <a:rPr kumimoji="1" lang="ja-JP" altLang="en-US" smtClean="0"/>
               <a:t>‹#›</a:t>
             </a:fld>
@@ -552,7 +552,7 @@
     </p:spTree>
     <p:extLst>
       <p:ext uri="{BB962C8B-B14F-4D97-AF65-F5344CB8AC3E}">
-        <p14:creationId xmlns:p14="http://schemas.microsoft.com/office/powerpoint/2010/main" val="496008106"/>
+        <p14:creationId xmlns:p14="http://schemas.microsoft.com/office/powerpoint/2010/main" val="3733975433"/>
       </p:ext>
     </p:extLst>
   </p:cSld>
@@ -584,7 +584,7 @@
           <p:cNvPr id="2" name="縦書きタイトル 1">
             <a:extLst>
               <a:ext uri="{FF2B5EF4-FFF2-40B4-BE49-F238E27FC236}">
-                <a16:creationId xmlns:a16="http://schemas.microsoft.com/office/drawing/2014/main" id="{BEB53D2C-7314-38FA-F533-5773B00B5DBC}"/>
+                <a16:creationId xmlns:a16="http://schemas.microsoft.com/office/drawing/2014/main" id="{F70FEBCF-C4DA-6334-0678-B056A1053BBC}"/>
               </a:ext>
             </a:extLst>
           </p:cNvPr>
@@ -617,7 +617,7 @@
           <p:cNvPr id="3" name="縦書きテキスト プレースホルダー 2">
             <a:extLst>
               <a:ext uri="{FF2B5EF4-FFF2-40B4-BE49-F238E27FC236}">
-                <a16:creationId xmlns:a16="http://schemas.microsoft.com/office/drawing/2014/main" id="{FE193AAC-D20C-0D47-DCDC-85BA658308D9}"/>
+                <a16:creationId xmlns:a16="http://schemas.microsoft.com/office/drawing/2014/main" id="{164FD69C-8E1C-150C-F8A7-F4473430D61C}"/>
               </a:ext>
             </a:extLst>
           </p:cNvPr>
@@ -711,7 +711,7 @@
           <p:cNvPr id="4" name="日付プレースホルダー 3">
             <a:extLst>
               <a:ext uri="{FF2B5EF4-FFF2-40B4-BE49-F238E27FC236}">
-                <a16:creationId xmlns:a16="http://schemas.microsoft.com/office/drawing/2014/main" id="{A72AA928-163C-F13F-0F76-8F19A425EB6E}"/>
+                <a16:creationId xmlns:a16="http://schemas.microsoft.com/office/drawing/2014/main" id="{028B874C-29E5-2B44-B352-ACC7D4ADA837}"/>
               </a:ext>
             </a:extLst>
           </p:cNvPr>
@@ -727,7 +727,7 @@
           <a:bodyPr/>
           <a:lstStyle/>
           <a:p>
-            <a:fld id="{01E49689-CFB7-41ED-B10D-644F9472EC4B}" type="datetimeFigureOut">
+            <a:fld id="{E0067E29-33DB-46FA-A4BF-55C2424EE3F1}" type="datetimeFigureOut">
               <a:rPr kumimoji="1" lang="ja-JP" altLang="en-US" smtClean="0"/>
               <a:t>2026/7/30</a:t>
             </a:fld>
@@ -740,7 +740,7 @@
           <p:cNvPr id="5" name="フッター プレースホルダー 4">
             <a:extLst>
               <a:ext uri="{FF2B5EF4-FFF2-40B4-BE49-F238E27FC236}">
-                <a16:creationId xmlns:a16="http://schemas.microsoft.com/office/drawing/2014/main" id="{492BB284-47F8-B164-F6A4-A7DD72B51630}"/>
+                <a16:creationId xmlns:a16="http://schemas.microsoft.com/office/drawing/2014/main" id="{9DE82611-EE8B-0807-1D1B-062B95087751}"/>
               </a:ext>
             </a:extLst>
           </p:cNvPr>
@@ -765,7 +765,7 @@
           <p:cNvPr id="6" name="スライド番号プレースホルダー 5">
             <a:extLst>
               <a:ext uri="{FF2B5EF4-FFF2-40B4-BE49-F238E27FC236}">
-                <a16:creationId xmlns:a16="http://schemas.microsoft.com/office/drawing/2014/main" id="{1222FD5A-5528-0E72-E64C-322B0782301E}"/>
+                <a16:creationId xmlns:a16="http://schemas.microsoft.com/office/drawing/2014/main" id="{F681DD9F-F742-2822-B838-AFE385A71B7A}"/>
               </a:ext>
             </a:extLst>
           </p:cNvPr>
@@ -781,7 +781,7 @@
           <a:bodyPr/>
           <a:lstStyle/>
           <a:p>
-            <a:fld id="{83E7A7C4-7FBC-467C-B688-FCCB2757B01F}" type="slidenum">
+            <a:fld id="{C0D520E9-7B49-49BF-B12B-E685C26A66D8}" type="slidenum">
               <a:rPr kumimoji="1" lang="ja-JP" altLang="en-US" smtClean="0"/>
               <a:t>‹#›</a:t>
             </a:fld>
@@ -792,7 +792,7 @@
     </p:spTree>
     <p:extLst>
       <p:ext uri="{BB962C8B-B14F-4D97-AF65-F5344CB8AC3E}">
-        <p14:creationId xmlns:p14="http://schemas.microsoft.com/office/powerpoint/2010/main" val="1601611976"/>
+        <p14:creationId xmlns:p14="http://schemas.microsoft.com/office/powerpoint/2010/main" val="3079831107"/>
       </p:ext>
     </p:extLst>
   </p:cSld>
@@ -824,7 +824,7 @@
           <p:cNvPr id="2" name="タイトル 1">
             <a:extLst>
               <a:ext uri="{FF2B5EF4-FFF2-40B4-BE49-F238E27FC236}">
-                <a16:creationId xmlns:a16="http://schemas.microsoft.com/office/drawing/2014/main" id="{B51CD6AE-89FD-DF5C-D202-7E078AE107AF}"/>
+                <a16:creationId xmlns:a16="http://schemas.microsoft.com/office/drawing/2014/main" id="{8A0FC16C-B4EF-EB9B-63AD-8AD986B86CAA}"/>
               </a:ext>
             </a:extLst>
           </p:cNvPr>
@@ -852,7 +852,7 @@
           <p:cNvPr id="3" name="コンテンツ プレースホルダー 2">
             <a:extLst>
               <a:ext uri="{FF2B5EF4-FFF2-40B4-BE49-F238E27FC236}">
-                <a16:creationId xmlns:a16="http://schemas.microsoft.com/office/drawing/2014/main" id="{8EAC7DEC-1048-9C42-A1D9-2B0F44319C58}"/>
+                <a16:creationId xmlns:a16="http://schemas.microsoft.com/office/drawing/2014/main" id="{C5D878EA-D5E4-FFF8-D445-B7EDE23AD86D}"/>
               </a:ext>
             </a:extLst>
           </p:cNvPr>
@@ -941,7 +941,7 @@
           <p:cNvPr id="4" name="日付プレースホルダー 3">
             <a:extLst>
               <a:ext uri="{FF2B5EF4-FFF2-40B4-BE49-F238E27FC236}">
-                <a16:creationId xmlns:a16="http://schemas.microsoft.com/office/drawing/2014/main" id="{68C0FF9C-8E22-74B6-4171-C56E4DF4D778}"/>
+                <a16:creationId xmlns:a16="http://schemas.microsoft.com/office/drawing/2014/main" id="{2C606C2F-7117-1213-6BA1-763DF0FC8EE1}"/>
               </a:ext>
             </a:extLst>
           </p:cNvPr>
@@ -957,7 +957,7 @@
           <a:bodyPr/>
           <a:lstStyle/>
           <a:p>
-            <a:fld id="{01E49689-CFB7-41ED-B10D-644F9472EC4B}" type="datetimeFigureOut">
+            <a:fld id="{E0067E29-33DB-46FA-A4BF-55C2424EE3F1}" type="datetimeFigureOut">
               <a:rPr kumimoji="1" lang="ja-JP" altLang="en-US" smtClean="0"/>
               <a:t>2026/7/30</a:t>
             </a:fld>
@@ -970,7 +970,7 @@
           <p:cNvPr id="5" name="フッター プレースホルダー 4">
             <a:extLst>
               <a:ext uri="{FF2B5EF4-FFF2-40B4-BE49-F238E27FC236}">
-                <a16:creationId xmlns:a16="http://schemas.microsoft.com/office/drawing/2014/main" id="{006F8F8B-8DE9-F2A2-E2B1-F25A3CD151B6}"/>
+                <a16:creationId xmlns:a16="http://schemas.microsoft.com/office/drawing/2014/main" id="{A67F46FB-FDD2-1BC1-FB15-DA4AD870B1A9}"/>
               </a:ext>
             </a:extLst>
           </p:cNvPr>
@@ -995,7 +995,7 @@
           <p:cNvPr id="6" name="スライド番号プレースホルダー 5">
             <a:extLst>
               <a:ext uri="{FF2B5EF4-FFF2-40B4-BE49-F238E27FC236}">
-                <a16:creationId xmlns:a16="http://schemas.microsoft.com/office/drawing/2014/main" id="{E02FE82D-DDA2-30AB-AAF5-EB723522CE47}"/>
+                <a16:creationId xmlns:a16="http://schemas.microsoft.com/office/drawing/2014/main" id="{0D4B4555-B9FF-8BD6-5881-F3C00BE5C94B}"/>
               </a:ext>
             </a:extLst>
           </p:cNvPr>
@@ -1011,7 +1011,7 @@
           <a:bodyPr/>
           <a:lstStyle/>
           <a:p>
-            <a:fld id="{83E7A7C4-7FBC-467C-B688-FCCB2757B01F}" type="slidenum">
+            <a:fld id="{C0D520E9-7B49-49BF-B12B-E685C26A66D8}" type="slidenum">
               <a:rPr kumimoji="1" lang="ja-JP" altLang="en-US" smtClean="0"/>
               <a:t>‹#›</a:t>
             </a:fld>
@@ -1022,7 +1022,7 @@
     </p:spTree>
     <p:extLst>
       <p:ext uri="{BB962C8B-B14F-4D97-AF65-F5344CB8AC3E}">
-        <p14:creationId xmlns:p14="http://schemas.microsoft.com/office/powerpoint/2010/main" val="2559417732"/>
+        <p14:creationId xmlns:p14="http://schemas.microsoft.com/office/powerpoint/2010/main" val="729106517"/>
       </p:ext>
     </p:extLst>
   </p:cSld>
@@ -1054,7 +1054,7 @@
           <p:cNvPr id="2" name="タイトル 1">
             <a:extLst>
               <a:ext uri="{FF2B5EF4-FFF2-40B4-BE49-F238E27FC236}">
-                <a16:creationId xmlns:a16="http://schemas.microsoft.com/office/drawing/2014/main" id="{BE3EB735-6D24-8CE4-1863-0246475E10D5}"/>
+                <a16:creationId xmlns:a16="http://schemas.microsoft.com/office/drawing/2014/main" id="{85570939-8A97-4E4F-A312-2DCD2BD70586}"/>
               </a:ext>
             </a:extLst>
           </p:cNvPr>
@@ -1091,7 +1091,7 @@
           <p:cNvPr id="3" name="テキスト プレースホルダー 2">
             <a:extLst>
               <a:ext uri="{FF2B5EF4-FFF2-40B4-BE49-F238E27FC236}">
-                <a16:creationId xmlns:a16="http://schemas.microsoft.com/office/drawing/2014/main" id="{72B8445B-F735-12B8-83FB-EF06B20BA869}"/>
+                <a16:creationId xmlns:a16="http://schemas.microsoft.com/office/drawing/2014/main" id="{BAFD9DAB-B1A3-C3D6-6A88-2FBFB3DFC849}"/>
               </a:ext>
             </a:extLst>
           </p:cNvPr>
@@ -1216,7 +1216,7 @@
           <p:cNvPr id="4" name="日付プレースホルダー 3">
             <a:extLst>
               <a:ext uri="{FF2B5EF4-FFF2-40B4-BE49-F238E27FC236}">
-                <a16:creationId xmlns:a16="http://schemas.microsoft.com/office/drawing/2014/main" id="{AE2EF08F-DE5E-12DB-0EF6-29556F6A9431}"/>
+                <a16:creationId xmlns:a16="http://schemas.microsoft.com/office/drawing/2014/main" id="{54DBE9C1-F963-9E71-BFA7-3836F6C0DAAD}"/>
               </a:ext>
             </a:extLst>
           </p:cNvPr>
@@ -1232,7 +1232,7 @@
           <a:bodyPr/>
           <a:lstStyle/>
           <a:p>
-            <a:fld id="{01E49689-CFB7-41ED-B10D-644F9472EC4B}" type="datetimeFigureOut">
+            <a:fld id="{E0067E29-33DB-46FA-A4BF-55C2424EE3F1}" type="datetimeFigureOut">
               <a:rPr kumimoji="1" lang="ja-JP" altLang="en-US" smtClean="0"/>
               <a:t>2026/7/30</a:t>
             </a:fld>
@@ -1245,7 +1245,7 @@
           <p:cNvPr id="5" name="フッター プレースホルダー 4">
             <a:extLst>
               <a:ext uri="{FF2B5EF4-FFF2-40B4-BE49-F238E27FC236}">
-                <a16:creationId xmlns:a16="http://schemas.microsoft.com/office/drawing/2014/main" id="{D992781E-D575-8998-487C-5D2560F670F2}"/>
+                <a16:creationId xmlns:a16="http://schemas.microsoft.com/office/drawing/2014/main" id="{BE32D56E-DC59-77BB-BC3A-FEE07B2F5512}"/>
               </a:ext>
             </a:extLst>
           </p:cNvPr>
@@ -1270,7 +1270,7 @@
           <p:cNvPr id="6" name="スライド番号プレースホルダー 5">
             <a:extLst>
               <a:ext uri="{FF2B5EF4-FFF2-40B4-BE49-F238E27FC236}">
-                <a16:creationId xmlns:a16="http://schemas.microsoft.com/office/drawing/2014/main" id="{81C95F83-0998-20D1-0125-8721B13124C5}"/>
+                <a16:creationId xmlns:a16="http://schemas.microsoft.com/office/drawing/2014/main" id="{C90A610A-BA94-DA30-3310-C3745062F51B}"/>
               </a:ext>
             </a:extLst>
           </p:cNvPr>
@@ -1286,7 +1286,7 @@
           <a:bodyPr/>
           <a:lstStyle/>
           <a:p>
-            <a:fld id="{83E7A7C4-7FBC-467C-B688-FCCB2757B01F}" type="slidenum">
+            <a:fld id="{C0D520E9-7B49-49BF-B12B-E685C26A66D8}" type="slidenum">
               <a:rPr kumimoji="1" lang="ja-JP" altLang="en-US" smtClean="0"/>
               <a:t>‹#›</a:t>
             </a:fld>
@@ -1297,7 +1297,7 @@
     </p:spTree>
     <p:extLst>
       <p:ext uri="{BB962C8B-B14F-4D97-AF65-F5344CB8AC3E}">
-        <p14:creationId xmlns:p14="http://schemas.microsoft.com/office/powerpoint/2010/main" val="2644966896"/>
+        <p14:creationId xmlns:p14="http://schemas.microsoft.com/office/powerpoint/2010/main" val="2905567428"/>
       </p:ext>
     </p:extLst>
   </p:cSld>
@@ -1329,7 +1329,7 @@
           <p:cNvPr id="2" name="タイトル 1">
             <a:extLst>
               <a:ext uri="{FF2B5EF4-FFF2-40B4-BE49-F238E27FC236}">
-                <a16:creationId xmlns:a16="http://schemas.microsoft.com/office/drawing/2014/main" id="{7CFBB1A8-0EF3-B155-7A52-1A17839F6861}"/>
+                <a16:creationId xmlns:a16="http://schemas.microsoft.com/office/drawing/2014/main" id="{09C66EE3-674D-D39F-1B9E-41847EC68B55}"/>
               </a:ext>
             </a:extLst>
           </p:cNvPr>
@@ -1357,7 +1357,7 @@
           <p:cNvPr id="3" name="コンテンツ プレースホルダー 2">
             <a:extLst>
               <a:ext uri="{FF2B5EF4-FFF2-40B4-BE49-F238E27FC236}">
-                <a16:creationId xmlns:a16="http://schemas.microsoft.com/office/drawing/2014/main" id="{174FEE19-21E7-1ECB-9D5A-B8F5E516B913}"/>
+                <a16:creationId xmlns:a16="http://schemas.microsoft.com/office/drawing/2014/main" id="{AE3FF41C-9D13-61D2-9FEE-7AEA3C8EB19B}"/>
               </a:ext>
             </a:extLst>
           </p:cNvPr>
@@ -1451,7 +1451,7 @@
           <p:cNvPr id="4" name="コンテンツ プレースホルダー 3">
             <a:extLst>
               <a:ext uri="{FF2B5EF4-FFF2-40B4-BE49-F238E27FC236}">
-                <a16:creationId xmlns:a16="http://schemas.microsoft.com/office/drawing/2014/main" id="{32B17C21-650E-24D0-A2DA-EBC1F26CA65F}"/>
+                <a16:creationId xmlns:a16="http://schemas.microsoft.com/office/drawing/2014/main" id="{CDF4577A-3481-CE7A-A8E4-6CFF1CABD6A6}"/>
               </a:ext>
             </a:extLst>
           </p:cNvPr>
@@ -1545,7 +1545,7 @@
           <p:cNvPr id="5" name="日付プレースホルダー 4">
             <a:extLst>
               <a:ext uri="{FF2B5EF4-FFF2-40B4-BE49-F238E27FC236}">
-                <a16:creationId xmlns:a16="http://schemas.microsoft.com/office/drawing/2014/main" id="{D6971971-2055-48E2-9592-55F86C9F3893}"/>
+                <a16:creationId xmlns:a16="http://schemas.microsoft.com/office/drawing/2014/main" id="{9BF04C91-DCF1-275F-8264-9457732AB318}"/>
               </a:ext>
             </a:extLst>
           </p:cNvPr>
@@ -1561,7 +1561,7 @@
           <a:bodyPr/>
           <a:lstStyle/>
           <a:p>
-            <a:fld id="{01E49689-CFB7-41ED-B10D-644F9472EC4B}" type="datetimeFigureOut">
+            <a:fld id="{E0067E29-33DB-46FA-A4BF-55C2424EE3F1}" type="datetimeFigureOut">
               <a:rPr kumimoji="1" lang="ja-JP" altLang="en-US" smtClean="0"/>
               <a:t>2026/7/30</a:t>
             </a:fld>
@@ -1574,7 +1574,7 @@
           <p:cNvPr id="6" name="フッター プレースホルダー 5">
             <a:extLst>
               <a:ext uri="{FF2B5EF4-FFF2-40B4-BE49-F238E27FC236}">
-                <a16:creationId xmlns:a16="http://schemas.microsoft.com/office/drawing/2014/main" id="{0977AAD7-50D0-FB52-78DC-6620E1C84AD1}"/>
+                <a16:creationId xmlns:a16="http://schemas.microsoft.com/office/drawing/2014/main" id="{434A82B6-A191-C635-A2A5-BECFD96D9350}"/>
               </a:ext>
             </a:extLst>
           </p:cNvPr>
@@ -1599,7 +1599,7 @@
           <p:cNvPr id="7" name="スライド番号プレースホルダー 6">
             <a:extLst>
               <a:ext uri="{FF2B5EF4-FFF2-40B4-BE49-F238E27FC236}">
-                <a16:creationId xmlns:a16="http://schemas.microsoft.com/office/drawing/2014/main" id="{9294344C-7987-6407-1414-B6888CA11C89}"/>
+                <a16:creationId xmlns:a16="http://schemas.microsoft.com/office/drawing/2014/main" id="{76F7A22F-9CD6-204B-4711-1ADC78645949}"/>
               </a:ext>
             </a:extLst>
           </p:cNvPr>
@@ -1615,7 +1615,7 @@
           <a:bodyPr/>
           <a:lstStyle/>
           <a:p>
-            <a:fld id="{83E7A7C4-7FBC-467C-B688-FCCB2757B01F}" type="slidenum">
+            <a:fld id="{C0D520E9-7B49-49BF-B12B-E685C26A66D8}" type="slidenum">
               <a:rPr kumimoji="1" lang="ja-JP" altLang="en-US" smtClean="0"/>
               <a:t>‹#›</a:t>
             </a:fld>
@@ -1626,7 +1626,7 @@
     </p:spTree>
     <p:extLst>
       <p:ext uri="{BB962C8B-B14F-4D97-AF65-F5344CB8AC3E}">
-        <p14:creationId xmlns:p14="http://schemas.microsoft.com/office/powerpoint/2010/main" val="3239043063"/>
+        <p14:creationId xmlns:p14="http://schemas.microsoft.com/office/powerpoint/2010/main" val="2152474604"/>
       </p:ext>
     </p:extLst>
   </p:cSld>
@@ -1658,7 +1658,7 @@
           <p:cNvPr id="2" name="タイトル 1">
             <a:extLst>
               <a:ext uri="{FF2B5EF4-FFF2-40B4-BE49-F238E27FC236}">
-                <a16:creationId xmlns:a16="http://schemas.microsoft.com/office/drawing/2014/main" id="{D4D162C8-8EA9-CE26-E637-0DB9D8BAFB44}"/>
+                <a16:creationId xmlns:a16="http://schemas.microsoft.com/office/drawing/2014/main" id="{A54AE07B-EF59-B4F0-6985-6315A4D527AE}"/>
               </a:ext>
             </a:extLst>
           </p:cNvPr>
@@ -1691,7 +1691,7 @@
           <p:cNvPr id="3" name="テキスト プレースホルダー 2">
             <a:extLst>
               <a:ext uri="{FF2B5EF4-FFF2-40B4-BE49-F238E27FC236}">
-                <a16:creationId xmlns:a16="http://schemas.microsoft.com/office/drawing/2014/main" id="{9D3D4933-B278-B9A6-1EC6-26D3F8C18482}"/>
+                <a16:creationId xmlns:a16="http://schemas.microsoft.com/office/drawing/2014/main" id="{172D603E-8FD8-02BC-2B5C-037EA074B26D}"/>
               </a:ext>
             </a:extLst>
           </p:cNvPr>
@@ -1762,7 +1762,7 @@
           <p:cNvPr id="4" name="コンテンツ プレースホルダー 3">
             <a:extLst>
               <a:ext uri="{FF2B5EF4-FFF2-40B4-BE49-F238E27FC236}">
-                <a16:creationId xmlns:a16="http://schemas.microsoft.com/office/drawing/2014/main" id="{31DE1A0D-85CA-C3B2-7916-89C24E3FD034}"/>
+                <a16:creationId xmlns:a16="http://schemas.microsoft.com/office/drawing/2014/main" id="{0F9F173D-CEEE-9CDB-07E3-03D7F25DC1FF}"/>
               </a:ext>
             </a:extLst>
           </p:cNvPr>
@@ -1856,7 +1856,7 @@
           <p:cNvPr id="5" name="テキスト プレースホルダー 4">
             <a:extLst>
               <a:ext uri="{FF2B5EF4-FFF2-40B4-BE49-F238E27FC236}">
-                <a16:creationId xmlns:a16="http://schemas.microsoft.com/office/drawing/2014/main" id="{CCB0C7D5-9467-EC6A-77ED-0887A6D1602C}"/>
+                <a16:creationId xmlns:a16="http://schemas.microsoft.com/office/drawing/2014/main" id="{735DD5AD-5059-3E4E-C8A7-D78AB2E91D30}"/>
               </a:ext>
             </a:extLst>
           </p:cNvPr>
@@ -1927,7 +1927,7 @@
           <p:cNvPr id="6" name="コンテンツ プレースホルダー 5">
             <a:extLst>
               <a:ext uri="{FF2B5EF4-FFF2-40B4-BE49-F238E27FC236}">
-                <a16:creationId xmlns:a16="http://schemas.microsoft.com/office/drawing/2014/main" id="{93A61F51-A498-552B-DC91-12B44A5BA132}"/>
+                <a16:creationId xmlns:a16="http://schemas.microsoft.com/office/drawing/2014/main" id="{2DC4E906-57A3-E080-9335-D936D3822BC7}"/>
               </a:ext>
             </a:extLst>
           </p:cNvPr>
@@ -2021,7 +2021,7 @@
           <p:cNvPr id="7" name="日付プレースホルダー 6">
             <a:extLst>
               <a:ext uri="{FF2B5EF4-FFF2-40B4-BE49-F238E27FC236}">
-                <a16:creationId xmlns:a16="http://schemas.microsoft.com/office/drawing/2014/main" id="{2B67F94C-0641-57AE-9C80-E4AE983FC398}"/>
+                <a16:creationId xmlns:a16="http://schemas.microsoft.com/office/drawing/2014/main" id="{8BC784D3-3B6A-B58F-585B-2BEEE8EF2CA3}"/>
               </a:ext>
             </a:extLst>
           </p:cNvPr>
@@ -2037,7 +2037,7 @@
           <a:bodyPr/>
           <a:lstStyle/>
           <a:p>
-            <a:fld id="{01E49689-CFB7-41ED-B10D-644F9472EC4B}" type="datetimeFigureOut">
+            <a:fld id="{E0067E29-33DB-46FA-A4BF-55C2424EE3F1}" type="datetimeFigureOut">
               <a:rPr kumimoji="1" lang="ja-JP" altLang="en-US" smtClean="0"/>
               <a:t>2026/7/30</a:t>
             </a:fld>
@@ -2050,7 +2050,7 @@
           <p:cNvPr id="8" name="フッター プレースホルダー 7">
             <a:extLst>
               <a:ext uri="{FF2B5EF4-FFF2-40B4-BE49-F238E27FC236}">
-                <a16:creationId xmlns:a16="http://schemas.microsoft.com/office/drawing/2014/main" id="{944E4BED-A4CD-BDCE-ECCF-219CDD09F5EE}"/>
+                <a16:creationId xmlns:a16="http://schemas.microsoft.com/office/drawing/2014/main" id="{E8E77086-3C81-4CA6-6540-AB45C9433D1B}"/>
               </a:ext>
             </a:extLst>
           </p:cNvPr>
@@ -2075,7 +2075,7 @@
           <p:cNvPr id="9" name="スライド番号プレースホルダー 8">
             <a:extLst>
               <a:ext uri="{FF2B5EF4-FFF2-40B4-BE49-F238E27FC236}">
-                <a16:creationId xmlns:a16="http://schemas.microsoft.com/office/drawing/2014/main" id="{320CD615-A134-357E-FAD1-C5AD20DF2E29}"/>
+                <a16:creationId xmlns:a16="http://schemas.microsoft.com/office/drawing/2014/main" id="{6204D54F-EB9B-B009-6B70-CDF25CEFA505}"/>
               </a:ext>
             </a:extLst>
           </p:cNvPr>
@@ -2091,7 +2091,7 @@
           <a:bodyPr/>
           <a:lstStyle/>
           <a:p>
-            <a:fld id="{83E7A7C4-7FBC-467C-B688-FCCB2757B01F}" type="slidenum">
+            <a:fld id="{C0D520E9-7B49-49BF-B12B-E685C26A66D8}" type="slidenum">
               <a:rPr kumimoji="1" lang="ja-JP" altLang="en-US" smtClean="0"/>
               <a:t>‹#›</a:t>
             </a:fld>
@@ -2102,7 +2102,7 @@
     </p:spTree>
     <p:extLst>
       <p:ext uri="{BB962C8B-B14F-4D97-AF65-F5344CB8AC3E}">
-        <p14:creationId xmlns:p14="http://schemas.microsoft.com/office/powerpoint/2010/main" val="1108210760"/>
+        <p14:creationId xmlns:p14="http://schemas.microsoft.com/office/powerpoint/2010/main" val="72824900"/>
       </p:ext>
     </p:extLst>
   </p:cSld>
@@ -2134,7 +2134,7 @@
           <p:cNvPr id="2" name="タイトル 1">
             <a:extLst>
               <a:ext uri="{FF2B5EF4-FFF2-40B4-BE49-F238E27FC236}">
-                <a16:creationId xmlns:a16="http://schemas.microsoft.com/office/drawing/2014/main" id="{AD27F588-6061-4825-1D79-E4DFA1E3798F}"/>
+                <a16:creationId xmlns:a16="http://schemas.microsoft.com/office/drawing/2014/main" id="{787013DA-9461-4D3C-4A08-8B74DE4B4C4C}"/>
               </a:ext>
             </a:extLst>
           </p:cNvPr>
@@ -2162,7 +2162,7 @@
           <p:cNvPr id="3" name="日付プレースホルダー 2">
             <a:extLst>
               <a:ext uri="{FF2B5EF4-FFF2-40B4-BE49-F238E27FC236}">
-                <a16:creationId xmlns:a16="http://schemas.microsoft.com/office/drawing/2014/main" id="{09BAB687-6803-28E0-9A0E-74CD39B324F7}"/>
+                <a16:creationId xmlns:a16="http://schemas.microsoft.com/office/drawing/2014/main" id="{9B4BA557-43AF-9E18-44FE-7AB905C59F0E}"/>
               </a:ext>
             </a:extLst>
           </p:cNvPr>
@@ -2178,7 +2178,7 @@
           <a:bodyPr/>
           <a:lstStyle/>
           <a:p>
-            <a:fld id="{01E49689-CFB7-41ED-B10D-644F9472EC4B}" type="datetimeFigureOut">
+            <a:fld id="{E0067E29-33DB-46FA-A4BF-55C2424EE3F1}" type="datetimeFigureOut">
               <a:rPr kumimoji="1" lang="ja-JP" altLang="en-US" smtClean="0"/>
               <a:t>2026/7/30</a:t>
             </a:fld>
@@ -2191,7 +2191,7 @@
           <p:cNvPr id="4" name="フッター プレースホルダー 3">
             <a:extLst>
               <a:ext uri="{FF2B5EF4-FFF2-40B4-BE49-F238E27FC236}">
-                <a16:creationId xmlns:a16="http://schemas.microsoft.com/office/drawing/2014/main" id="{1BC6EA83-679F-30C4-167E-5DE3D7F345C9}"/>
+                <a16:creationId xmlns:a16="http://schemas.microsoft.com/office/drawing/2014/main" id="{DA861C72-BE0F-8DFE-91AD-CF33F4F7D4C2}"/>
               </a:ext>
             </a:extLst>
           </p:cNvPr>
@@ -2216,7 +2216,7 @@
           <p:cNvPr id="5" name="スライド番号プレースホルダー 4">
             <a:extLst>
               <a:ext uri="{FF2B5EF4-FFF2-40B4-BE49-F238E27FC236}">
-                <a16:creationId xmlns:a16="http://schemas.microsoft.com/office/drawing/2014/main" id="{D1EE7A79-1593-4B1B-620C-415A19E5C860}"/>
+                <a16:creationId xmlns:a16="http://schemas.microsoft.com/office/drawing/2014/main" id="{38D0CE55-9E89-58AF-B18A-D44E3174A31C}"/>
               </a:ext>
             </a:extLst>
           </p:cNvPr>
@@ -2232,7 +2232,7 @@
           <a:bodyPr/>
           <a:lstStyle/>
           <a:p>
-            <a:fld id="{83E7A7C4-7FBC-467C-B688-FCCB2757B01F}" type="slidenum">
+            <a:fld id="{C0D520E9-7B49-49BF-B12B-E685C26A66D8}" type="slidenum">
               <a:rPr kumimoji="1" lang="ja-JP" altLang="en-US" smtClean="0"/>
               <a:t>‹#›</a:t>
             </a:fld>
@@ -2243,7 +2243,7 @@
     </p:spTree>
     <p:extLst>
       <p:ext uri="{BB962C8B-B14F-4D97-AF65-F5344CB8AC3E}">
-        <p14:creationId xmlns:p14="http://schemas.microsoft.com/office/powerpoint/2010/main" val="3748267033"/>
+        <p14:creationId xmlns:p14="http://schemas.microsoft.com/office/powerpoint/2010/main" val="3748118189"/>
       </p:ext>
     </p:extLst>
   </p:cSld>
@@ -2275,7 +2275,7 @@
           <p:cNvPr id="2" name="日付プレースホルダー 1">
             <a:extLst>
               <a:ext uri="{FF2B5EF4-FFF2-40B4-BE49-F238E27FC236}">
-                <a16:creationId xmlns:a16="http://schemas.microsoft.com/office/drawing/2014/main" id="{6D5CE44E-BEFC-BEDA-42F6-1AEBAA30023F}"/>
+                <a16:creationId xmlns:a16="http://schemas.microsoft.com/office/drawing/2014/main" id="{56FE5FD6-4595-2BDB-8F7B-2A3AFAA4C455}"/>
               </a:ext>
             </a:extLst>
           </p:cNvPr>
@@ -2291,7 +2291,7 @@
           <a:bodyPr/>
           <a:lstStyle/>
           <a:p>
-            <a:fld id="{01E49689-CFB7-41ED-B10D-644F9472EC4B}" type="datetimeFigureOut">
+            <a:fld id="{E0067E29-33DB-46FA-A4BF-55C2424EE3F1}" type="datetimeFigureOut">
               <a:rPr kumimoji="1" lang="ja-JP" altLang="en-US" smtClean="0"/>
               <a:t>2026/7/30</a:t>
             </a:fld>
@@ -2304,7 +2304,7 @@
           <p:cNvPr id="3" name="フッター プレースホルダー 2">
             <a:extLst>
               <a:ext uri="{FF2B5EF4-FFF2-40B4-BE49-F238E27FC236}">
-                <a16:creationId xmlns:a16="http://schemas.microsoft.com/office/drawing/2014/main" id="{AD810D64-B06C-C563-19E5-1D7DC86A329C}"/>
+                <a16:creationId xmlns:a16="http://schemas.microsoft.com/office/drawing/2014/main" id="{4196CE8D-7873-454A-1C1B-A56A7B3EB60B}"/>
               </a:ext>
             </a:extLst>
           </p:cNvPr>
@@ -2329,7 +2329,7 @@
           <p:cNvPr id="4" name="スライド番号プレースホルダー 3">
             <a:extLst>
               <a:ext uri="{FF2B5EF4-FFF2-40B4-BE49-F238E27FC236}">
-                <a16:creationId xmlns:a16="http://schemas.microsoft.com/office/drawing/2014/main" id="{5E4C8110-9ECF-2A27-971A-8CD19113EF8D}"/>
+                <a16:creationId xmlns:a16="http://schemas.microsoft.com/office/drawing/2014/main" id="{7CE5FBAF-E1B2-2901-3FBF-ED7D3D5DE679}"/>
               </a:ext>
             </a:extLst>
           </p:cNvPr>
@@ -2345,7 +2345,7 @@
           <a:bodyPr/>
           <a:lstStyle/>
           <a:p>
-            <a:fld id="{83E7A7C4-7FBC-467C-B688-FCCB2757B01F}" type="slidenum">
+            <a:fld id="{C0D520E9-7B49-49BF-B12B-E685C26A66D8}" type="slidenum">
               <a:rPr kumimoji="1" lang="ja-JP" altLang="en-US" smtClean="0"/>
               <a:t>‹#›</a:t>
             </a:fld>
@@ -2356,7 +2356,7 @@
     </p:spTree>
     <p:extLst>
       <p:ext uri="{BB962C8B-B14F-4D97-AF65-F5344CB8AC3E}">
-        <p14:creationId xmlns:p14="http://schemas.microsoft.com/office/powerpoint/2010/main" val="3298729293"/>
+        <p14:creationId xmlns:p14="http://schemas.microsoft.com/office/powerpoint/2010/main" val="4178113645"/>
       </p:ext>
     </p:extLst>
   </p:cSld>
@@ -2388,7 +2388,7 @@
           <p:cNvPr id="2" name="タイトル 1">
             <a:extLst>
               <a:ext uri="{FF2B5EF4-FFF2-40B4-BE49-F238E27FC236}">
-                <a16:creationId xmlns:a16="http://schemas.microsoft.com/office/drawing/2014/main" id="{71ACB318-BAD8-008A-1548-287D3E2F6347}"/>
+                <a16:creationId xmlns:a16="http://schemas.microsoft.com/office/drawing/2014/main" id="{F91C4399-BC1E-951F-BC2E-9D2805193872}"/>
               </a:ext>
             </a:extLst>
           </p:cNvPr>
@@ -2425,7 +2425,7 @@
           <p:cNvPr id="3" name="コンテンツ プレースホルダー 2">
             <a:extLst>
               <a:ext uri="{FF2B5EF4-FFF2-40B4-BE49-F238E27FC236}">
-                <a16:creationId xmlns:a16="http://schemas.microsoft.com/office/drawing/2014/main" id="{973BCADC-3CBC-C2EE-88B3-9AA659D2A242}"/>
+                <a16:creationId xmlns:a16="http://schemas.microsoft.com/office/drawing/2014/main" id="{C3DF3A3E-8328-B605-A375-BE78DB21CEAE}"/>
               </a:ext>
             </a:extLst>
           </p:cNvPr>
@@ -2547,7 +2547,7 @@
           <p:cNvPr id="4" name="テキスト プレースホルダー 3">
             <a:extLst>
               <a:ext uri="{FF2B5EF4-FFF2-40B4-BE49-F238E27FC236}">
-                <a16:creationId xmlns:a16="http://schemas.microsoft.com/office/drawing/2014/main" id="{AECF3FB8-E0C7-192B-83FB-9C1CA39EF56E}"/>
+                <a16:creationId xmlns:a16="http://schemas.microsoft.com/office/drawing/2014/main" id="{F4D894D1-0360-C212-DF93-D2342A81DF09}"/>
               </a:ext>
             </a:extLst>
           </p:cNvPr>
@@ -2618,7 +2618,7 @@
           <p:cNvPr id="5" name="日付プレースホルダー 4">
             <a:extLst>
               <a:ext uri="{FF2B5EF4-FFF2-40B4-BE49-F238E27FC236}">
-                <a16:creationId xmlns:a16="http://schemas.microsoft.com/office/drawing/2014/main" id="{0C340B7D-F70D-B43A-3232-51A8C387E6C3}"/>
+                <a16:creationId xmlns:a16="http://schemas.microsoft.com/office/drawing/2014/main" id="{18406207-6136-DB14-4F16-5C397B73D55E}"/>
               </a:ext>
             </a:extLst>
           </p:cNvPr>
@@ -2634,7 +2634,7 @@
           <a:bodyPr/>
           <a:lstStyle/>
           <a:p>
-            <a:fld id="{01E49689-CFB7-41ED-B10D-644F9472EC4B}" type="datetimeFigureOut">
+            <a:fld id="{E0067E29-33DB-46FA-A4BF-55C2424EE3F1}" type="datetimeFigureOut">
               <a:rPr kumimoji="1" lang="ja-JP" altLang="en-US" smtClean="0"/>
               <a:t>2026/7/30</a:t>
             </a:fld>
@@ -2647,7 +2647,7 @@
           <p:cNvPr id="6" name="フッター プレースホルダー 5">
             <a:extLst>
               <a:ext uri="{FF2B5EF4-FFF2-40B4-BE49-F238E27FC236}">
-                <a16:creationId xmlns:a16="http://schemas.microsoft.com/office/drawing/2014/main" id="{BE4A5E70-6B4B-4D6E-E383-07FD7BFD9343}"/>
+                <a16:creationId xmlns:a16="http://schemas.microsoft.com/office/drawing/2014/main" id="{816C6738-91DF-A47C-215D-5DFA9C9A9F64}"/>
               </a:ext>
             </a:extLst>
           </p:cNvPr>
@@ -2672,7 +2672,7 @@
           <p:cNvPr id="7" name="スライド番号プレースホルダー 6">
             <a:extLst>
               <a:ext uri="{FF2B5EF4-FFF2-40B4-BE49-F238E27FC236}">
-                <a16:creationId xmlns:a16="http://schemas.microsoft.com/office/drawing/2014/main" id="{1D48B08F-B8CF-2658-2731-AE617EB49CC3}"/>
+                <a16:creationId xmlns:a16="http://schemas.microsoft.com/office/drawing/2014/main" id="{E183331D-B88B-7E17-F211-9DE40CBAB82A}"/>
               </a:ext>
             </a:extLst>
           </p:cNvPr>
@@ -2688,7 +2688,7 @@
           <a:bodyPr/>
           <a:lstStyle/>
           <a:p>
-            <a:fld id="{83E7A7C4-7FBC-467C-B688-FCCB2757B01F}" type="slidenum">
+            <a:fld id="{C0D520E9-7B49-49BF-B12B-E685C26A66D8}" type="slidenum">
               <a:rPr kumimoji="1" lang="ja-JP" altLang="en-US" smtClean="0"/>
               <a:t>‹#›</a:t>
             </a:fld>
@@ -2699,7 +2699,7 @@
     </p:spTree>
     <p:extLst>
       <p:ext uri="{BB962C8B-B14F-4D97-AF65-F5344CB8AC3E}">
-        <p14:creationId xmlns:p14="http://schemas.microsoft.com/office/powerpoint/2010/main" val="3113107138"/>
+        <p14:creationId xmlns:p14="http://schemas.microsoft.com/office/powerpoint/2010/main" val="2475604194"/>
       </p:ext>
     </p:extLst>
   </p:cSld>
@@ -2731,7 +2731,7 @@
           <p:cNvPr id="2" name="タイトル 1">
             <a:extLst>
               <a:ext uri="{FF2B5EF4-FFF2-40B4-BE49-F238E27FC236}">
-                <a16:creationId xmlns:a16="http://schemas.microsoft.com/office/drawing/2014/main" id="{13F508CC-E4B4-AED3-D7C7-AA5EC524FD80}"/>
+                <a16:creationId xmlns:a16="http://schemas.microsoft.com/office/drawing/2014/main" id="{CAA94901-B349-D59E-0C23-6D5812D1861F}"/>
               </a:ext>
             </a:extLst>
           </p:cNvPr>
@@ -2768,7 +2768,7 @@
           <p:cNvPr id="3" name="図プレースホルダー 2">
             <a:extLst>
               <a:ext uri="{FF2B5EF4-FFF2-40B4-BE49-F238E27FC236}">
-                <a16:creationId xmlns:a16="http://schemas.microsoft.com/office/drawing/2014/main" id="{49848D22-79AD-EA19-76AE-0BDE79A5A362}"/>
+                <a16:creationId xmlns:a16="http://schemas.microsoft.com/office/drawing/2014/main" id="{2D16DD47-76AB-1801-00E4-6A4D86CE770C}"/>
               </a:ext>
             </a:extLst>
           </p:cNvPr>
@@ -2835,7 +2835,7 @@
           <p:cNvPr id="4" name="テキスト プレースホルダー 3">
             <a:extLst>
               <a:ext uri="{FF2B5EF4-FFF2-40B4-BE49-F238E27FC236}">
-                <a16:creationId xmlns:a16="http://schemas.microsoft.com/office/drawing/2014/main" id="{70AC17D0-120A-04E9-2B2E-D5FC0C2746FD}"/>
+                <a16:creationId xmlns:a16="http://schemas.microsoft.com/office/drawing/2014/main" id="{5DC52D2B-5F86-D585-CBB9-70C60F56A818}"/>
               </a:ext>
             </a:extLst>
           </p:cNvPr>
@@ -2906,7 +2906,7 @@
           <p:cNvPr id="5" name="日付プレースホルダー 4">
             <a:extLst>
               <a:ext uri="{FF2B5EF4-FFF2-40B4-BE49-F238E27FC236}">
-                <a16:creationId xmlns:a16="http://schemas.microsoft.com/office/drawing/2014/main" id="{A982DBD0-50A4-CC21-C3D0-48EF906778C6}"/>
+                <a16:creationId xmlns:a16="http://schemas.microsoft.com/office/drawing/2014/main" id="{F567732B-8C35-4C9A-1FBF-A0B7A425B803}"/>
               </a:ext>
             </a:extLst>
           </p:cNvPr>
@@ -2922,7 +2922,7 @@
           <a:bodyPr/>
           <a:lstStyle/>
           <a:p>
-            <a:fld id="{01E49689-CFB7-41ED-B10D-644F9472EC4B}" type="datetimeFigureOut">
+            <a:fld id="{E0067E29-33DB-46FA-A4BF-55C2424EE3F1}" type="datetimeFigureOut">
               <a:rPr kumimoji="1" lang="ja-JP" altLang="en-US" smtClean="0"/>
               <a:t>2026/7/30</a:t>
             </a:fld>
@@ -2935,7 +2935,7 @@
           <p:cNvPr id="6" name="フッター プレースホルダー 5">
             <a:extLst>
               <a:ext uri="{FF2B5EF4-FFF2-40B4-BE49-F238E27FC236}">
-                <a16:creationId xmlns:a16="http://schemas.microsoft.com/office/drawing/2014/main" id="{A0135F45-DDD5-663C-8A90-7757D8E185B1}"/>
+                <a16:creationId xmlns:a16="http://schemas.microsoft.com/office/drawing/2014/main" id="{A3ECD007-C6D0-EE4A-CA3F-06815F79BD29}"/>
               </a:ext>
             </a:extLst>
           </p:cNvPr>
@@ -2960,7 +2960,7 @@
           <p:cNvPr id="7" name="スライド番号プレースホルダー 6">
             <a:extLst>
               <a:ext uri="{FF2B5EF4-FFF2-40B4-BE49-F238E27FC236}">
-                <a16:creationId xmlns:a16="http://schemas.microsoft.com/office/drawing/2014/main" id="{5F8AD9AE-A0CE-17DF-70E8-A445637327C2}"/>
+                <a16:creationId xmlns:a16="http://schemas.microsoft.com/office/drawing/2014/main" id="{AE7294E8-3152-40DC-58EE-2A83194D3A9E}"/>
               </a:ext>
             </a:extLst>
           </p:cNvPr>
@@ -2976,7 +2976,7 @@
           <a:bodyPr/>
           <a:lstStyle/>
           <a:p>
-            <a:fld id="{83E7A7C4-7FBC-467C-B688-FCCB2757B01F}" type="slidenum">
+            <a:fld id="{C0D520E9-7B49-49BF-B12B-E685C26A66D8}" type="slidenum">
               <a:rPr kumimoji="1" lang="ja-JP" altLang="en-US" smtClean="0"/>
               <a:t>‹#›</a:t>
             </a:fld>
@@ -2987,7 +2987,7 @@
     </p:spTree>
     <p:extLst>
       <p:ext uri="{BB962C8B-B14F-4D97-AF65-F5344CB8AC3E}">
-        <p14:creationId xmlns:p14="http://schemas.microsoft.com/office/powerpoint/2010/main" val="2878002535"/>
+        <p14:creationId xmlns:p14="http://schemas.microsoft.com/office/powerpoint/2010/main" val="3667739650"/>
       </p:ext>
     </p:extLst>
   </p:cSld>
@@ -3024,7 +3024,7 @@
           <p:cNvPr id="2" name="タイトル プレースホルダー 1">
             <a:extLst>
               <a:ext uri="{FF2B5EF4-FFF2-40B4-BE49-F238E27FC236}">
-                <a16:creationId xmlns:a16="http://schemas.microsoft.com/office/drawing/2014/main" id="{631C26D1-C43C-552F-975A-48CF03B0CCCC}"/>
+                <a16:creationId xmlns:a16="http://schemas.microsoft.com/office/drawing/2014/main" id="{D110A3E6-040A-6184-3333-A6989448E1EA}"/>
               </a:ext>
             </a:extLst>
           </p:cNvPr>
@@ -3062,7 +3062,7 @@
           <p:cNvPr id="3" name="テキスト プレースホルダー 2">
             <a:extLst>
               <a:ext uri="{FF2B5EF4-FFF2-40B4-BE49-F238E27FC236}">
-                <a16:creationId xmlns:a16="http://schemas.microsoft.com/office/drawing/2014/main" id="{4BCF990A-D2B6-60AD-28AC-45DAD8159081}"/>
+                <a16:creationId xmlns:a16="http://schemas.microsoft.com/office/drawing/2014/main" id="{0A8903A4-FBE7-7B75-F12A-D8EFB7178E2E}"/>
               </a:ext>
             </a:extLst>
           </p:cNvPr>
@@ -3161,7 +3161,7 @@
           <p:cNvPr id="4" name="日付プレースホルダー 3">
             <a:extLst>
               <a:ext uri="{FF2B5EF4-FFF2-40B4-BE49-F238E27FC236}">
-                <a16:creationId xmlns:a16="http://schemas.microsoft.com/office/drawing/2014/main" id="{4C1E09A0-3CA1-AB7C-FA98-87770FA73C09}"/>
+                <a16:creationId xmlns:a16="http://schemas.microsoft.com/office/drawing/2014/main" id="{2DFC3146-70BF-022D-4339-29E4CFA9E4FD}"/>
               </a:ext>
             </a:extLst>
           </p:cNvPr>
@@ -3195,7 +3195,7 @@
             </a:lvl1pPr>
           </a:lstStyle>
           <a:p>
-            <a:fld id="{01E49689-CFB7-41ED-B10D-644F9472EC4B}" type="datetimeFigureOut">
+            <a:fld id="{E0067E29-33DB-46FA-A4BF-55C2424EE3F1}" type="datetimeFigureOut">
               <a:rPr kumimoji="1" lang="ja-JP" altLang="en-US" smtClean="0"/>
               <a:t>2026/7/30</a:t>
             </a:fld>
@@ -3208,7 +3208,7 @@
           <p:cNvPr id="5" name="フッター プレースホルダー 4">
             <a:extLst>
               <a:ext uri="{FF2B5EF4-FFF2-40B4-BE49-F238E27FC236}">
-                <a16:creationId xmlns:a16="http://schemas.microsoft.com/office/drawing/2014/main" id="{C05E54F7-F3F1-EC64-08B6-F2D02028EBBE}"/>
+                <a16:creationId xmlns:a16="http://schemas.microsoft.com/office/drawing/2014/main" id="{CCE7DC13-5037-E4DD-8DF8-6009976B78D0}"/>
               </a:ext>
             </a:extLst>
           </p:cNvPr>
@@ -3251,7 +3251,7 @@
           <p:cNvPr id="6" name="スライド番号プレースホルダー 5">
             <a:extLst>
               <a:ext uri="{FF2B5EF4-FFF2-40B4-BE49-F238E27FC236}">
-                <a16:creationId xmlns:a16="http://schemas.microsoft.com/office/drawing/2014/main" id="{9EBB7B71-B91D-C09F-6FFD-6A08BE9AE270}"/>
+                <a16:creationId xmlns:a16="http://schemas.microsoft.com/office/drawing/2014/main" id="{8CDA7771-F227-FB84-6B7A-3C90C8F35950}"/>
               </a:ext>
             </a:extLst>
           </p:cNvPr>
@@ -3285,7 +3285,7 @@
             </a:lvl1pPr>
           </a:lstStyle>
           <a:p>
-            <a:fld id="{83E7A7C4-7FBC-467C-B688-FCCB2757B01F}" type="slidenum">
+            <a:fld id="{C0D520E9-7B49-49BF-B12B-E685C26A66D8}" type="slidenum">
               <a:rPr kumimoji="1" lang="ja-JP" altLang="en-US" smtClean="0"/>
               <a:t>‹#›</a:t>
             </a:fld>
@@ -3296,7 +3296,7 @@
     </p:spTree>
     <p:extLst>
       <p:ext uri="{BB962C8B-B14F-4D97-AF65-F5344CB8AC3E}">
-        <p14:creationId xmlns:p14="http://schemas.microsoft.com/office/powerpoint/2010/main" val="3827264267"/>
+        <p14:creationId xmlns:p14="http://schemas.microsoft.com/office/powerpoint/2010/main" val="2128634343"/>
       </p:ext>
     </p:extLst>
   </p:cSld>
@@ -3619,7 +3619,7 @@
           <p:cNvPr id="2" name="テキスト ボックス 1">
             <a:extLst>
               <a:ext uri="{FF2B5EF4-FFF2-40B4-BE49-F238E27FC236}">
-                <a16:creationId xmlns:a16="http://schemas.microsoft.com/office/drawing/2014/main" id="{AA2F92C8-ABE2-1DD2-1976-89A0000590DE}"/>
+                <a16:creationId xmlns:a16="http://schemas.microsoft.com/office/drawing/2014/main" id="{FECB7501-0959-6619-818F-32491E2562BB}"/>
               </a:ext>
             </a:extLst>
           </p:cNvPr>
@@ -3665,7 +3665,7 @@
           <p:cNvPr id="3" name="テキスト ボックス 2">
             <a:extLst>
               <a:ext uri="{FF2B5EF4-FFF2-40B4-BE49-F238E27FC236}">
-                <a16:creationId xmlns:a16="http://schemas.microsoft.com/office/drawing/2014/main" id="{2D03E5E9-1F8F-F214-496F-32F6EA7E547D}"/>
+                <a16:creationId xmlns:a16="http://schemas.microsoft.com/office/drawing/2014/main" id="{9706D88E-4139-3172-8C5B-FD1327C3D4D1}"/>
               </a:ext>
             </a:extLst>
           </p:cNvPr>
@@ -3695,14 +3695,17 @@
                 </a:solidFill>
                 <a:latin typeface="Arial" panose="020B0604020202020204" pitchFamily="34" charset="0"/>
               </a:rPr>
-              <a:t>vr-content-gear-guide TECH EXPLANATION</a:t>
-            </a:r>
-            <a:endParaRPr kumimoji="1" lang="ja-JP" altLang="en-US" sz="3400" b="1">
-              <a:solidFill>
-                <a:srgbClr val="111111"/>
-              </a:solidFill>
-              <a:latin typeface="Arial" panose="020B0604020202020204" pitchFamily="34" charset="0"/>
-            </a:endParaRPr>
+              <a:t>Vr Content Gear Guide</a:t>
+            </a:r>
+            <a:r>
+              <a:rPr kumimoji="1" lang="ja-JP" altLang="en-US" sz="3400" b="1">
+                <a:solidFill>
+                  <a:srgbClr val="111111"/>
+                </a:solidFill>
+                <a:latin typeface="Arial" panose="020B0604020202020204" pitchFamily="34" charset="0"/>
+              </a:rPr>
+              <a:t>の技術解説</a:t>
+            </a:r>
           </a:p>
         </p:txBody>
       </p:sp>
@@ -3711,7 +3714,7 @@
           <p:cNvPr id="4" name="テキスト ボックス 3">
             <a:extLst>
               <a:ext uri="{FF2B5EF4-FFF2-40B4-BE49-F238E27FC236}">
-                <a16:creationId xmlns:a16="http://schemas.microsoft.com/office/drawing/2014/main" id="{54B68120-B885-9949-9268-3D14964DA833}"/>
+                <a16:creationId xmlns:a16="http://schemas.microsoft.com/office/drawing/2014/main" id="{2D6C8556-68A6-3678-998B-1E0DB11C3461}"/>
               </a:ext>
             </a:extLst>
           </p:cNvPr>
@@ -3735,20 +3738,14 @@
           <a:lstStyle/>
           <a:p>
             <a:r>
-              <a:rPr kumimoji="1" lang="en-US" altLang="ja-JP" sz="2000">
+              <a:rPr kumimoji="1" lang="ja-JP" altLang="en-US" sz="2000">
                 <a:solidFill>
                   <a:srgbClr val="333333"/>
                 </a:solidFill>
                 <a:latin typeface="Arial" panose="020B0604020202020204" pitchFamily="34" charset="0"/>
               </a:rPr>
-              <a:t>Architecture, implementation and commit history in 75 seconds</a:t>
-            </a:r>
-            <a:endParaRPr kumimoji="1" lang="ja-JP" altLang="en-US" sz="2000">
-              <a:solidFill>
-                <a:srgbClr val="333333"/>
-              </a:solidFill>
-              <a:latin typeface="Arial" panose="020B0604020202020204" pitchFamily="34" charset="0"/>
-            </a:endParaRPr>
+              <a:t>設計・実装・コミットから学ぶ短時間プレビュー</a:t>
+            </a:r>
           </a:p>
         </p:txBody>
       </p:sp>
@@ -3757,7 +3754,7 @@
           <p:cNvPr id="5" name="テキスト ボックス 4">
             <a:extLst>
               <a:ext uri="{FF2B5EF4-FFF2-40B4-BE49-F238E27FC236}">
-                <a16:creationId xmlns:a16="http://schemas.microsoft.com/office/drawing/2014/main" id="{E7099517-7AD7-9DA7-2777-5CF346EB2327}"/>
+                <a16:creationId xmlns:a16="http://schemas.microsoft.com/office/drawing/2014/main" id="{92210E73-BBCD-5180-9F4E-A8EED24F4C32}"/>
               </a:ext>
             </a:extLst>
           </p:cNvPr>
@@ -3804,7 +3801,7 @@
             <a:hlinkClick r:id="" action="ppaction://media"/>
             <a:extLst>
               <a:ext uri="{FF2B5EF4-FFF2-40B4-BE49-F238E27FC236}">
-                <a16:creationId xmlns:a16="http://schemas.microsoft.com/office/drawing/2014/main" id="{8891A5F7-96F7-C601-0942-CDAC916B51E4}"/>
+                <a16:creationId xmlns:a16="http://schemas.microsoft.com/office/drawing/2014/main" id="{99FB41D4-4E02-C2D4-AD3C-BB64BB20BDAC}"/>
               </a:ext>
             </a:extLst>
           </p:cNvPr>
@@ -3839,7 +3836,7 @@
     </p:spTree>
     <p:extLst>
       <p:ext uri="{BB962C8B-B14F-4D97-AF65-F5344CB8AC3E}">
-        <p14:creationId xmlns:p14="http://schemas.microsoft.com/office/powerpoint/2010/main" val="338308995"/>
+        <p14:creationId xmlns:p14="http://schemas.microsoft.com/office/powerpoint/2010/main" val="719594866"/>
       </p:ext>
     </p:extLst>
   </p:cSld>
@@ -3963,7 +3960,7 @@
           <p:cNvPr id="2" name="テキスト ボックス 1">
             <a:extLst>
               <a:ext uri="{FF2B5EF4-FFF2-40B4-BE49-F238E27FC236}">
-                <a16:creationId xmlns:a16="http://schemas.microsoft.com/office/drawing/2014/main" id="{BF858216-4D62-9511-5908-8ACDB8DEFFB4}"/>
+                <a16:creationId xmlns:a16="http://schemas.microsoft.com/office/drawing/2014/main" id="{A50BE1FB-3E86-E563-A896-50DC1ABEA14F}"/>
               </a:ext>
             </a:extLst>
           </p:cNvPr>
@@ -4009,7 +4006,7 @@
           <p:cNvPr id="3" name="テキスト ボックス 2">
             <a:extLst>
               <a:ext uri="{FF2B5EF4-FFF2-40B4-BE49-F238E27FC236}">
-                <a16:creationId xmlns:a16="http://schemas.microsoft.com/office/drawing/2014/main" id="{4DA60C4D-C2BC-4928-2B4A-032E3D28AFD2}"/>
+                <a16:creationId xmlns:a16="http://schemas.microsoft.com/office/drawing/2014/main" id="{91979F7E-1A80-1BEE-1FC0-4E60479AE8EC}"/>
               </a:ext>
             </a:extLst>
           </p:cNvPr>
@@ -4033,20 +4030,14 @@
           <a:lstStyle/>
           <a:p>
             <a:r>
-              <a:rPr kumimoji="1" lang="en-US" altLang="ja-JP" sz="3400" b="1">
+              <a:rPr kumimoji="1" lang="ja-JP" altLang="en-US" sz="3400" b="1">
                 <a:solidFill>
                   <a:srgbClr val="111111"/>
                 </a:solidFill>
                 <a:latin typeface="Arial" panose="020B0604020202020204" pitchFamily="34" charset="0"/>
               </a:rPr>
-              <a:t>WHAT DOES IT SOLVE?</a:t>
-            </a:r>
-            <a:endParaRPr kumimoji="1" lang="ja-JP" altLang="en-US" sz="3400" b="1">
-              <a:solidFill>
-                <a:srgbClr val="111111"/>
-              </a:solidFill>
-              <a:latin typeface="Arial" panose="020B0604020202020204" pitchFamily="34" charset="0"/>
-            </a:endParaRPr>
+              <a:t>このプロジェクトは何を解決する？</a:t>
+            </a:r>
           </a:p>
         </p:txBody>
       </p:sp>
@@ -4055,7 +4046,7 @@
           <p:cNvPr id="4" name="テキスト ボックス 3">
             <a:extLst>
               <a:ext uri="{FF2B5EF4-FFF2-40B4-BE49-F238E27FC236}">
-                <a16:creationId xmlns:a16="http://schemas.microsoft.com/office/drawing/2014/main" id="{E800D535-7D7D-5F16-D17A-30D981B0581D}"/>
+                <a16:creationId xmlns:a16="http://schemas.microsoft.com/office/drawing/2014/main" id="{5973F2B2-09DE-BB73-08DA-D34EA039A9FF}"/>
               </a:ext>
             </a:extLst>
           </p:cNvPr>
@@ -4101,7 +4092,7 @@
           <p:cNvPr id="5" name="テキスト ボックス 4">
             <a:extLst>
               <a:ext uri="{FF2B5EF4-FFF2-40B4-BE49-F238E27FC236}">
-                <a16:creationId xmlns:a16="http://schemas.microsoft.com/office/drawing/2014/main" id="{04D9646D-E651-3FD1-BE59-63BBCA650C97}"/>
+                <a16:creationId xmlns:a16="http://schemas.microsoft.com/office/drawing/2014/main" id="{B57289D8-0ED5-8EF4-A392-B09C2F6E2C1D}"/>
               </a:ext>
             </a:extLst>
           </p:cNvPr>
@@ -4148,7 +4139,7 @@
             <a:hlinkClick r:id="" action="ppaction://media"/>
             <a:extLst>
               <a:ext uri="{FF2B5EF4-FFF2-40B4-BE49-F238E27FC236}">
-                <a16:creationId xmlns:a16="http://schemas.microsoft.com/office/drawing/2014/main" id="{44F73B72-E115-C451-2BBE-F839591A671A}"/>
+                <a16:creationId xmlns:a16="http://schemas.microsoft.com/office/drawing/2014/main" id="{F3E81554-9013-5ECB-1358-9A430B38CB32}"/>
               </a:ext>
             </a:extLst>
           </p:cNvPr>
@@ -4183,7 +4174,7 @@
     </p:spTree>
     <p:extLst>
       <p:ext uri="{BB962C8B-B14F-4D97-AF65-F5344CB8AC3E}">
-        <p14:creationId xmlns:p14="http://schemas.microsoft.com/office/powerpoint/2010/main" val="2554316023"/>
+        <p14:creationId xmlns:p14="http://schemas.microsoft.com/office/powerpoint/2010/main" val="1527544086"/>
       </p:ext>
     </p:extLst>
   </p:cSld>
@@ -4307,7 +4298,7 @@
           <p:cNvPr id="2" name="テキスト ボックス 1">
             <a:extLst>
               <a:ext uri="{FF2B5EF4-FFF2-40B4-BE49-F238E27FC236}">
-                <a16:creationId xmlns:a16="http://schemas.microsoft.com/office/drawing/2014/main" id="{78066777-D65D-8A9A-3428-CD615C40586E}"/>
+                <a16:creationId xmlns:a16="http://schemas.microsoft.com/office/drawing/2014/main" id="{6ACEBE90-19B2-D771-E424-3CF6DDB8D7D3}"/>
               </a:ext>
             </a:extLst>
           </p:cNvPr>
@@ -4353,7 +4344,7 @@
           <p:cNvPr id="3" name="テキスト ボックス 2">
             <a:extLst>
               <a:ext uri="{FF2B5EF4-FFF2-40B4-BE49-F238E27FC236}">
-                <a16:creationId xmlns:a16="http://schemas.microsoft.com/office/drawing/2014/main" id="{737532ED-6AE9-7E89-DC15-029F625B9D84}"/>
+                <a16:creationId xmlns:a16="http://schemas.microsoft.com/office/drawing/2014/main" id="{A79B1888-E9D0-D8DD-D579-8FE21F916210}"/>
               </a:ext>
             </a:extLst>
           </p:cNvPr>
@@ -4377,20 +4368,14 @@
           <a:lstStyle/>
           <a:p>
             <a:r>
-              <a:rPr kumimoji="1" lang="en-US" altLang="ja-JP" sz="3400" b="1">
+              <a:rPr kumimoji="1" lang="ja-JP" altLang="en-US" sz="3400" b="1">
                 <a:solidFill>
                   <a:srgbClr val="111111"/>
                 </a:solidFill>
                 <a:latin typeface="Arial" panose="020B0604020202020204" pitchFamily="34" charset="0"/>
               </a:rPr>
-              <a:t>TECH STACK</a:t>
-            </a:r>
-            <a:endParaRPr kumimoji="1" lang="ja-JP" altLang="en-US" sz="3400" b="1">
-              <a:solidFill>
-                <a:srgbClr val="111111"/>
-              </a:solidFill>
-              <a:latin typeface="Arial" panose="020B0604020202020204" pitchFamily="34" charset="0"/>
-            </a:endParaRPr>
+              <a:t>技術スタック</a:t>
+            </a:r>
           </a:p>
         </p:txBody>
       </p:sp>
@@ -4399,7 +4384,7 @@
           <p:cNvPr id="4" name="テキスト ボックス 3">
             <a:extLst>
               <a:ext uri="{FF2B5EF4-FFF2-40B4-BE49-F238E27FC236}">
-                <a16:creationId xmlns:a16="http://schemas.microsoft.com/office/drawing/2014/main" id="{7662EA9E-BAEE-EC27-C2C9-9180B57FFC9D}"/>
+                <a16:creationId xmlns:a16="http://schemas.microsoft.com/office/drawing/2014/main" id="{FA04F892-2E61-2D0A-8589-D9A5F1F8BF72}"/>
               </a:ext>
             </a:extLst>
           </p:cNvPr>
@@ -4409,7 +4394,7 @@
         <p:spPr>
           <a:xfrm>
             <a:off x="533400" y="3429000"/>
-            <a:ext cx="10795000" cy="400110"/>
+            <a:ext cx="10795000" cy="707886"/>
           </a:xfrm>
           <a:prstGeom prst="rect">
             <a:avLst/>
@@ -4423,13 +4408,22 @@
           <a:lstStyle/>
           <a:p>
             <a:r>
+              <a:rPr kumimoji="1" lang="ja-JP" altLang="en-US" sz="2000">
+                <a:solidFill>
+                  <a:srgbClr val="333333"/>
+                </a:solidFill>
+                <a:latin typeface="Arial" panose="020B0604020202020204" pitchFamily="34" charset="0"/>
+              </a:rPr>
+              <a:t>主要技術：</a:t>
+            </a:r>
+            <a:r>
               <a:rPr kumimoji="1" lang="en-US" altLang="ja-JP" sz="2000">
                 <a:solidFill>
                   <a:srgbClr val="333333"/>
                 </a:solidFill>
                 <a:latin typeface="Arial" panose="020B0604020202020204" pitchFamily="34" charset="0"/>
               </a:rPr>
-              <a:t>Primary technologies: TypeScript</a:t>
+              <a:t>TypeScript</a:t>
             </a:r>
             <a:r>
               <a:rPr kumimoji="1" lang="ja-JP" altLang="en-US" sz="2000">
@@ -4447,14 +4441,18 @@
                 </a:solidFill>
                 <a:latin typeface="Arial" panose="020B0604020202020204" pitchFamily="34" charset="0"/>
               </a:rPr>
-              <a:t>JavaScript</a:t>
-            </a:r>
-            <a:endParaRPr kumimoji="1" lang="ja-JP" altLang="en-US" sz="2000">
-              <a:solidFill>
-                <a:srgbClr val="333333"/>
-              </a:solidFill>
-              <a:latin typeface="Arial" panose="020B0604020202020204" pitchFamily="34" charset="0"/>
-            </a:endParaRPr>
+              <a:t>JavaScript
+</a:t>
+            </a:r>
+            <a:r>
+              <a:rPr kumimoji="1" lang="ja-JP" altLang="en-US" sz="2000">
+                <a:solidFill>
+                  <a:srgbClr val="333333"/>
+                </a:solidFill>
+                <a:latin typeface="Arial" panose="020B0604020202020204" pitchFamily="34" charset="0"/>
+              </a:rPr>
+              <a:t>役割を分け、保守しやすい構成を目指しています。</a:t>
+            </a:r>
           </a:p>
         </p:txBody>
       </p:sp>
@@ -4463,7 +4461,7 @@
           <p:cNvPr id="5" name="テキスト ボックス 4">
             <a:extLst>
               <a:ext uri="{FF2B5EF4-FFF2-40B4-BE49-F238E27FC236}">
-                <a16:creationId xmlns:a16="http://schemas.microsoft.com/office/drawing/2014/main" id="{F59359E4-B2D3-E7A6-E6A0-4F4A73963226}"/>
+                <a16:creationId xmlns:a16="http://schemas.microsoft.com/office/drawing/2014/main" id="{C0BFA554-D9F4-4E9E-7605-1711A61DA99C}"/>
               </a:ext>
             </a:extLst>
           </p:cNvPr>
@@ -4510,7 +4508,7 @@
             <a:hlinkClick r:id="" action="ppaction://media"/>
             <a:extLst>
               <a:ext uri="{FF2B5EF4-FFF2-40B4-BE49-F238E27FC236}">
-                <a16:creationId xmlns:a16="http://schemas.microsoft.com/office/drawing/2014/main" id="{632155F6-CD96-21C6-0726-FEE584916908}"/>
+                <a16:creationId xmlns:a16="http://schemas.microsoft.com/office/drawing/2014/main" id="{57CDF1B2-7494-B6D6-16CE-353E4B42386D}"/>
               </a:ext>
             </a:extLst>
           </p:cNvPr>
@@ -4545,7 +4543,7 @@
     </p:spTree>
     <p:extLst>
       <p:ext uri="{BB962C8B-B14F-4D97-AF65-F5344CB8AC3E}">
-        <p14:creationId xmlns:p14="http://schemas.microsoft.com/office/powerpoint/2010/main" val="1420755087"/>
+        <p14:creationId xmlns:p14="http://schemas.microsoft.com/office/powerpoint/2010/main" val="172935971"/>
       </p:ext>
     </p:extLst>
   </p:cSld>
@@ -4669,7 +4667,7 @@
           <p:cNvPr id="2" name="テキスト ボックス 1">
             <a:extLst>
               <a:ext uri="{FF2B5EF4-FFF2-40B4-BE49-F238E27FC236}">
-                <a16:creationId xmlns:a16="http://schemas.microsoft.com/office/drawing/2014/main" id="{CF4B4C0C-46AB-8E6D-3DED-6A6DBBF25C39}"/>
+                <a16:creationId xmlns:a16="http://schemas.microsoft.com/office/drawing/2014/main" id="{CDDAA70D-B269-94FB-4588-1662649DD7F1}"/>
               </a:ext>
             </a:extLst>
           </p:cNvPr>
@@ -4715,7 +4713,7 @@
           <p:cNvPr id="3" name="テキスト ボックス 2">
             <a:extLst>
               <a:ext uri="{FF2B5EF4-FFF2-40B4-BE49-F238E27FC236}">
-                <a16:creationId xmlns:a16="http://schemas.microsoft.com/office/drawing/2014/main" id="{FD54981A-3D3D-F52D-C4B7-A6920E420621}"/>
+                <a16:creationId xmlns:a16="http://schemas.microsoft.com/office/drawing/2014/main" id="{17509334-2286-F743-506E-96F73FE08FA1}"/>
               </a:ext>
             </a:extLst>
           </p:cNvPr>
@@ -4739,20 +4737,14 @@
           <a:lstStyle/>
           <a:p>
             <a:r>
-              <a:rPr kumimoji="1" lang="en-US" altLang="ja-JP" sz="3400" b="1">
+              <a:rPr kumimoji="1" lang="ja-JP" altLang="en-US" sz="3400" b="1">
                 <a:solidFill>
                   <a:srgbClr val="111111"/>
                 </a:solidFill>
                 <a:latin typeface="Arial" panose="020B0604020202020204" pitchFamily="34" charset="0"/>
               </a:rPr>
-              <a:t>REPOSITORY HIGHLIGHTS</a:t>
-            </a:r>
-            <a:endParaRPr kumimoji="1" lang="ja-JP" altLang="en-US" sz="3400" b="1">
-              <a:solidFill>
-                <a:srgbClr val="111111"/>
-              </a:solidFill>
-              <a:latin typeface="Arial" panose="020B0604020202020204" pitchFamily="34" charset="0"/>
-            </a:endParaRPr>
+              <a:t>リポジトリの読みどころ</a:t>
+            </a:r>
           </a:p>
         </p:txBody>
       </p:sp>
@@ -4761,7 +4753,7 @@
           <p:cNvPr id="4" name="テキスト ボックス 3">
             <a:extLst>
               <a:ext uri="{FF2B5EF4-FFF2-40B4-BE49-F238E27FC236}">
-                <a16:creationId xmlns:a16="http://schemas.microsoft.com/office/drawing/2014/main" id="{2EA0EA21-4CD8-D36D-9E80-925D20AE580C}"/>
+                <a16:creationId xmlns:a16="http://schemas.microsoft.com/office/drawing/2014/main" id="{62B32CE7-E1FD-AD84-E372-AC5FCDA92AE0}"/>
               </a:ext>
             </a:extLst>
           </p:cNvPr>
@@ -4771,7 +4763,7 @@
         <p:spPr>
           <a:xfrm>
             <a:off x="533400" y="3429000"/>
-            <a:ext cx="10795000" cy="400110"/>
+            <a:ext cx="10795000" cy="707886"/>
           </a:xfrm>
           <a:prstGeom prst="rect">
             <a:avLst/>
@@ -4785,13 +4777,77 @@
           <a:lstStyle/>
           <a:p>
             <a:r>
+              <a:rPr kumimoji="1" lang="ja-JP" altLang="en-US" sz="2000">
+                <a:solidFill>
+                  <a:srgbClr val="333333"/>
+                </a:solidFill>
+                <a:latin typeface="Arial" panose="020B0604020202020204" pitchFamily="34" charset="0"/>
+              </a:rPr>
+              <a:t>公開コード、</a:t>
+            </a:r>
+            <a:r>
               <a:rPr kumimoji="1" lang="en-US" altLang="ja-JP" sz="2000">
                 <a:solidFill>
                   <a:srgbClr val="333333"/>
                 </a:solidFill>
                 <a:latin typeface="Arial" panose="020B0604020202020204" pitchFamily="34" charset="0"/>
               </a:rPr>
-              <a:t>Public source code, README and commit history reveal the design decisions.</a:t>
+              <a:t>README</a:t>
+            </a:r>
+            <a:r>
+              <a:rPr kumimoji="1" lang="ja-JP" altLang="en-US" sz="2000">
+                <a:solidFill>
+                  <a:srgbClr val="333333"/>
+                </a:solidFill>
+                <a:latin typeface="Arial" panose="020B0604020202020204" pitchFamily="34" charset="0"/>
+              </a:rPr>
+              <a:t>、コミット履歴から設計判断を確認できます。
+主なファイル：</a:t>
+            </a:r>
+            <a:r>
+              <a:rPr kumimoji="1" lang="en-US" altLang="ja-JP" sz="2000">
+                <a:solidFill>
+                  <a:srgbClr val="333333"/>
+                </a:solidFill>
+                <a:latin typeface="Arial" panose="020B0604020202020204" pitchFamily="34" charset="0"/>
+              </a:rPr>
+              <a:t>README.md</a:t>
+            </a:r>
+            <a:r>
+              <a:rPr kumimoji="1" lang="ja-JP" altLang="en-US" sz="2000">
+                <a:solidFill>
+                  <a:srgbClr val="333333"/>
+                </a:solidFill>
+                <a:latin typeface="Arial" panose="020B0604020202020204" pitchFamily="34" charset="0"/>
+              </a:rPr>
+              <a:t>、</a:t>
+            </a:r>
+            <a:r>
+              <a:rPr kumimoji="1" lang="en-US" altLang="ja-JP" sz="2000">
+                <a:solidFill>
+                  <a:srgbClr val="333333"/>
+                </a:solidFill>
+                <a:latin typeface="Arial" panose="020B0604020202020204" pitchFamily="34" charset="0"/>
+              </a:rPr>
+              <a:t>app</a:t>
+            </a:r>
+            <a:r>
+              <a:rPr kumimoji="1" lang="ja-JP" altLang="en-US" sz="2000">
+                <a:solidFill>
+                  <a:srgbClr val="333333"/>
+                </a:solidFill>
+                <a:latin typeface="Arial" panose="020B0604020202020204" pitchFamily="34" charset="0"/>
+              </a:rPr>
+              <a:t>、</a:t>
+            </a:r>
+            <a:r>
+              <a:rPr kumimoji="1" lang="en-US" altLang="ja-JP" sz="2000">
+                <a:solidFill>
+                  <a:srgbClr val="333333"/>
+                </a:solidFill>
+                <a:latin typeface="Arial" panose="020B0604020202020204" pitchFamily="34" charset="0"/>
+              </a:rPr>
+              <a:t>build</a:t>
             </a:r>
             <a:endParaRPr kumimoji="1" lang="ja-JP" altLang="en-US" sz="2000">
               <a:solidFill>
@@ -4807,7 +4863,7 @@
           <p:cNvPr id="5" name="テキスト ボックス 4">
             <a:extLst>
               <a:ext uri="{FF2B5EF4-FFF2-40B4-BE49-F238E27FC236}">
-                <a16:creationId xmlns:a16="http://schemas.microsoft.com/office/drawing/2014/main" id="{54C2EE21-A438-F961-7FEE-9F5E336B5663}"/>
+                <a16:creationId xmlns:a16="http://schemas.microsoft.com/office/drawing/2014/main" id="{FD684964-DACE-C26E-AD3D-3F08E0F8B0F3}"/>
               </a:ext>
             </a:extLst>
           </p:cNvPr>
@@ -4854,7 +4910,7 @@
             <a:hlinkClick r:id="" action="ppaction://media"/>
             <a:extLst>
               <a:ext uri="{FF2B5EF4-FFF2-40B4-BE49-F238E27FC236}">
-                <a16:creationId xmlns:a16="http://schemas.microsoft.com/office/drawing/2014/main" id="{3E90B2A7-BE22-B44B-7211-C64759003FA9}"/>
+                <a16:creationId xmlns:a16="http://schemas.microsoft.com/office/drawing/2014/main" id="{1B082470-DB5B-9A17-D261-12F4537483CB}"/>
               </a:ext>
             </a:extLst>
           </p:cNvPr>
@@ -4889,7 +4945,7 @@
     </p:spTree>
     <p:extLst>
       <p:ext uri="{BB962C8B-B14F-4D97-AF65-F5344CB8AC3E}">
-        <p14:creationId xmlns:p14="http://schemas.microsoft.com/office/powerpoint/2010/main" val="1008090996"/>
+        <p14:creationId xmlns:p14="http://schemas.microsoft.com/office/powerpoint/2010/main" val="2964673208"/>
       </p:ext>
     </p:extLst>
   </p:cSld>
@@ -5013,7 +5069,7 @@
           <p:cNvPr id="2" name="テキスト ボックス 1">
             <a:extLst>
               <a:ext uri="{FF2B5EF4-FFF2-40B4-BE49-F238E27FC236}">
-                <a16:creationId xmlns:a16="http://schemas.microsoft.com/office/drawing/2014/main" id="{632A55FE-F01E-5CBB-85FA-703749438F2A}"/>
+                <a16:creationId xmlns:a16="http://schemas.microsoft.com/office/drawing/2014/main" id="{3209816E-2186-CC61-B028-5D2DB02A724E}"/>
               </a:ext>
             </a:extLst>
           </p:cNvPr>
@@ -5059,7 +5115,7 @@
           <p:cNvPr id="3" name="テキスト ボックス 2">
             <a:extLst>
               <a:ext uri="{FF2B5EF4-FFF2-40B4-BE49-F238E27FC236}">
-                <a16:creationId xmlns:a16="http://schemas.microsoft.com/office/drawing/2014/main" id="{76D9E160-E686-E876-B280-3FA238FC98C7}"/>
+                <a16:creationId xmlns:a16="http://schemas.microsoft.com/office/drawing/2014/main" id="{EC6D5B5A-C537-7F78-FB03-8768B1490974}"/>
               </a:ext>
             </a:extLst>
           </p:cNvPr>
@@ -5083,20 +5139,14 @@
           <a:lstStyle/>
           <a:p>
             <a:r>
-              <a:rPr kumimoji="1" lang="en-US" altLang="ja-JP" sz="3400" b="1">
+              <a:rPr kumimoji="1" lang="ja-JP" altLang="en-US" sz="3400" b="1">
                 <a:solidFill>
                   <a:srgbClr val="111111"/>
                 </a:solidFill>
                 <a:latin typeface="Arial" panose="020B0604020202020204" pitchFamily="34" charset="0"/>
               </a:rPr>
-              <a:t>ITERATIVE IMPROVEMENT</a:t>
-            </a:r>
-            <a:endParaRPr kumimoji="1" lang="ja-JP" altLang="en-US" sz="3400" b="1">
-              <a:solidFill>
-                <a:srgbClr val="111111"/>
-              </a:solidFill>
-              <a:latin typeface="Arial" panose="020B0604020202020204" pitchFamily="34" charset="0"/>
-            </a:endParaRPr>
+              <a:t>コミットから分かる改善</a:t>
+            </a:r>
           </a:p>
         </p:txBody>
       </p:sp>
@@ -5105,7 +5155,7 @@
           <p:cNvPr id="4" name="テキスト ボックス 3">
             <a:extLst>
               <a:ext uri="{FF2B5EF4-FFF2-40B4-BE49-F238E27FC236}">
-                <a16:creationId xmlns:a16="http://schemas.microsoft.com/office/drawing/2014/main" id="{36F4F778-5EE7-A43B-0FD6-7FAC6ECFB810}"/>
+                <a16:creationId xmlns:a16="http://schemas.microsoft.com/office/drawing/2014/main" id="{E1EFAAA5-C12E-548E-0B20-7C70393B680D}"/>
               </a:ext>
             </a:extLst>
           </p:cNvPr>
@@ -5135,7 +5185,7 @@
                 </a:solidFill>
                 <a:latin typeface="Arial" panose="020B0604020202020204" pitchFamily="34" charset="0"/>
               </a:rPr>
-              <a:t>Small commits continuously improve features, quality and release readiness.</a:t>
+              <a:t>Configure Sites project</a:t>
             </a:r>
             <a:endParaRPr kumimoji="1" lang="ja-JP" altLang="en-US" sz="2000">
               <a:solidFill>
@@ -5151,7 +5201,7 @@
           <p:cNvPr id="5" name="テキスト ボックス 4">
             <a:extLst>
               <a:ext uri="{FF2B5EF4-FFF2-40B4-BE49-F238E27FC236}">
-                <a16:creationId xmlns:a16="http://schemas.microsoft.com/office/drawing/2014/main" id="{3F06D848-D644-63EC-A058-55F46B442D36}"/>
+                <a16:creationId xmlns:a16="http://schemas.microsoft.com/office/drawing/2014/main" id="{B4BD06EF-E48D-B8D2-C453-3E8DA6FD1A01}"/>
               </a:ext>
             </a:extLst>
           </p:cNvPr>
@@ -5198,7 +5248,7 @@
             <a:hlinkClick r:id="" action="ppaction://media"/>
             <a:extLst>
               <a:ext uri="{FF2B5EF4-FFF2-40B4-BE49-F238E27FC236}">
-                <a16:creationId xmlns:a16="http://schemas.microsoft.com/office/drawing/2014/main" id="{C4F417C1-87DF-02BD-A715-D3D1FFD63E9B}"/>
+                <a16:creationId xmlns:a16="http://schemas.microsoft.com/office/drawing/2014/main" id="{2BC2F8E6-FEBF-FD4D-6541-CCAC8DFFEFF3}"/>
               </a:ext>
             </a:extLst>
           </p:cNvPr>
@@ -5233,7 +5283,7 @@
     </p:spTree>
     <p:extLst>
       <p:ext uri="{BB962C8B-B14F-4D97-AF65-F5344CB8AC3E}">
-        <p14:creationId xmlns:p14="http://schemas.microsoft.com/office/powerpoint/2010/main" val="3650591309"/>
+        <p14:creationId xmlns:p14="http://schemas.microsoft.com/office/powerpoint/2010/main" val="2325740009"/>
       </p:ext>
     </p:extLst>
   </p:cSld>
@@ -5357,7 +5407,7 @@
           <p:cNvPr id="2" name="テキスト ボックス 1">
             <a:extLst>
               <a:ext uri="{FF2B5EF4-FFF2-40B4-BE49-F238E27FC236}">
-                <a16:creationId xmlns:a16="http://schemas.microsoft.com/office/drawing/2014/main" id="{29752159-75D8-CF53-BE92-30D5ED52313C}"/>
+                <a16:creationId xmlns:a16="http://schemas.microsoft.com/office/drawing/2014/main" id="{0B654A4F-E42B-4174-3289-C0758E44CA85}"/>
               </a:ext>
             </a:extLst>
           </p:cNvPr>
@@ -5403,7 +5453,7 @@
           <p:cNvPr id="3" name="テキスト ボックス 2">
             <a:extLst>
               <a:ext uri="{FF2B5EF4-FFF2-40B4-BE49-F238E27FC236}">
-                <a16:creationId xmlns:a16="http://schemas.microsoft.com/office/drawing/2014/main" id="{FCB804D0-E79F-37D6-8F65-2D5176921D16}"/>
+                <a16:creationId xmlns:a16="http://schemas.microsoft.com/office/drawing/2014/main" id="{09B47F44-1287-E6D7-443A-76CF353286EA}"/>
               </a:ext>
             </a:extLst>
           </p:cNvPr>
@@ -5427,20 +5477,14 @@
           <a:lstStyle/>
           <a:p>
             <a:r>
-              <a:rPr kumimoji="1" lang="en-US" altLang="ja-JP" sz="3400" b="1">
+              <a:rPr kumimoji="1" lang="ja-JP" altLang="en-US" sz="3400" b="1">
                 <a:solidFill>
                   <a:srgbClr val="111111"/>
                 </a:solidFill>
                 <a:latin typeface="Arial" panose="020B0604020202020204" pitchFamily="34" charset="0"/>
               </a:rPr>
-              <a:t>READ THE FULL ARTICLE</a:t>
-            </a:r>
-            <a:endParaRPr kumimoji="1" lang="ja-JP" altLang="en-US" sz="3400" b="1">
-              <a:solidFill>
-                <a:srgbClr val="111111"/>
-              </a:solidFill>
-              <a:latin typeface="Arial" panose="020B0604020202020204" pitchFamily="34" charset="0"/>
-            </a:endParaRPr>
+              <a:t>詳しくは積み上げログへ</a:t>
+            </a:r>
           </a:p>
         </p:txBody>
       </p:sp>
@@ -5449,7 +5493,7 @@
           <p:cNvPr id="4" name="テキスト ボックス 3">
             <a:extLst>
               <a:ext uri="{FF2B5EF4-FFF2-40B4-BE49-F238E27FC236}">
-                <a16:creationId xmlns:a16="http://schemas.microsoft.com/office/drawing/2014/main" id="{70505B9D-BD98-6F53-1DEB-2DB22D096E40}"/>
+                <a16:creationId xmlns:a16="http://schemas.microsoft.com/office/drawing/2014/main" id="{32015A7C-77DA-4A6C-1AF5-D525DCF349D4}"/>
               </a:ext>
             </a:extLst>
           </p:cNvPr>
@@ -5473,14 +5517,32 @@
           <a:lstStyle/>
           <a:p>
             <a:r>
-              <a:rPr kumimoji="1" lang="sv-SE" altLang="ja-JP" sz="2000">
+              <a:rPr kumimoji="1" lang="zh-TW" altLang="en-US" sz="2000">
+                <a:solidFill>
+                  <a:srgbClr val="333333"/>
+                </a:solidFill>
+                <a:latin typeface="Arial" panose="020B0604020202020204" pitchFamily="34" charset="0"/>
+              </a:rPr>
+              <a:t>記事： </a:t>
+            </a:r>
+            <a:r>
+              <a:rPr kumimoji="1" lang="en-US" altLang="zh-TW" sz="2000">
                 <a:solidFill>
                   <a:srgbClr val="333333"/>
                 </a:solidFill>
                 <a:latin typeface="Arial" panose="020B0604020202020204" pitchFamily="34" charset="0"/>
               </a:rPr>
               <a:t>https://syunnjack.dev/articles/vr-content-gear-guide
-TSUMIAGE LOG</a:t>
+</a:t>
+            </a:r>
+            <a:r>
+              <a:rPr kumimoji="1" lang="zh-TW" altLang="en-US" sz="2000">
+                <a:solidFill>
+                  <a:srgbClr val="333333"/>
+                </a:solidFill>
+                <a:latin typeface="Arial" panose="020B0604020202020204" pitchFamily="34" charset="0"/>
+              </a:rPr>
+              <a:t>学び、作り、振り返る開発記録。</a:t>
             </a:r>
             <a:endParaRPr kumimoji="1" lang="ja-JP" altLang="en-US" sz="2000">
               <a:solidFill>
@@ -5496,7 +5558,7 @@
           <p:cNvPr id="5" name="テキスト ボックス 4">
             <a:extLst>
               <a:ext uri="{FF2B5EF4-FFF2-40B4-BE49-F238E27FC236}">
-                <a16:creationId xmlns:a16="http://schemas.microsoft.com/office/drawing/2014/main" id="{6F0F95FE-9B59-195A-A8DD-53FDC2A3DBC9}"/>
+                <a16:creationId xmlns:a16="http://schemas.microsoft.com/office/drawing/2014/main" id="{4C4A8569-1B10-6817-E5D4-9DD34662B7F8}"/>
               </a:ext>
             </a:extLst>
           </p:cNvPr>
@@ -5543,7 +5605,7 @@
             <a:hlinkClick r:id="" action="ppaction://media"/>
             <a:extLst>
               <a:ext uri="{FF2B5EF4-FFF2-40B4-BE49-F238E27FC236}">
-                <a16:creationId xmlns:a16="http://schemas.microsoft.com/office/drawing/2014/main" id="{C33517A1-2ECA-25A3-41DA-3834EC6DFBC5}"/>
+                <a16:creationId xmlns:a16="http://schemas.microsoft.com/office/drawing/2014/main" id="{3C7217EC-4829-E67F-5A48-FEB10054123C}"/>
               </a:ext>
             </a:extLst>
           </p:cNvPr>
@@ -5578,7 +5640,7 @@
     </p:spTree>
     <p:extLst>
       <p:ext uri="{BB962C8B-B14F-4D97-AF65-F5344CB8AC3E}">
-        <p14:creationId xmlns:p14="http://schemas.microsoft.com/office/powerpoint/2010/main" val="1185923791"/>
+        <p14:creationId xmlns:p14="http://schemas.microsoft.com/office/powerpoint/2010/main" val="3284128346"/>
       </p:ext>
     </p:extLst>
   </p:cSld>

--- a/public/videos/repositories/vr-content-gear-guide/vr-content-gear-guide-tech-preview.pptx
+++ b/public/videos/repositories/vr-content-gear-guide/vr-content-gear-guide-tech-preview.pptx
@@ -134,7 +134,7 @@
           <p:cNvPr id="2" name="タイトル 1">
             <a:extLst>
               <a:ext uri="{FF2B5EF4-FFF2-40B4-BE49-F238E27FC236}">
-                <a16:creationId xmlns:a16="http://schemas.microsoft.com/office/drawing/2014/main" id="{C8EB39C1-D6DE-36EC-150E-BCF8B296D2CA}"/>
+                <a16:creationId xmlns:a16="http://schemas.microsoft.com/office/drawing/2014/main" id="{A764BCE4-EAAA-0105-62D5-C26D89C5BAFB}"/>
               </a:ext>
             </a:extLst>
           </p:cNvPr>
@@ -171,7 +171,7 @@
           <p:cNvPr id="3" name="字幕 2">
             <a:extLst>
               <a:ext uri="{FF2B5EF4-FFF2-40B4-BE49-F238E27FC236}">
-                <a16:creationId xmlns:a16="http://schemas.microsoft.com/office/drawing/2014/main" id="{BD8BB1FF-0EEA-D35C-A8D0-2E3913FC5557}"/>
+                <a16:creationId xmlns:a16="http://schemas.microsoft.com/office/drawing/2014/main" id="{932C998F-BFB5-2ACF-6B47-FF4DA918E332}"/>
               </a:ext>
             </a:extLst>
           </p:cNvPr>
@@ -241,7 +241,7 @@
           <p:cNvPr id="4" name="日付プレースホルダー 3">
             <a:extLst>
               <a:ext uri="{FF2B5EF4-FFF2-40B4-BE49-F238E27FC236}">
-                <a16:creationId xmlns:a16="http://schemas.microsoft.com/office/drawing/2014/main" id="{8D756399-1D5C-6CFA-374A-BF389BDE8C30}"/>
+                <a16:creationId xmlns:a16="http://schemas.microsoft.com/office/drawing/2014/main" id="{B8A9B119-EAAF-0011-3683-5A18819E4C9A}"/>
               </a:ext>
             </a:extLst>
           </p:cNvPr>
@@ -257,7 +257,7 @@
           <a:bodyPr/>
           <a:lstStyle/>
           <a:p>
-            <a:fld id="{E0067E29-33DB-46FA-A4BF-55C2424EE3F1}" type="datetimeFigureOut">
+            <a:fld id="{A8E3BFF6-5743-4169-BBBD-C8E90BFC3283}" type="datetimeFigureOut">
               <a:rPr kumimoji="1" lang="ja-JP" altLang="en-US" smtClean="0"/>
               <a:t>2026/7/30</a:t>
             </a:fld>
@@ -270,7 +270,7 @@
           <p:cNvPr id="5" name="フッター プレースホルダー 4">
             <a:extLst>
               <a:ext uri="{FF2B5EF4-FFF2-40B4-BE49-F238E27FC236}">
-                <a16:creationId xmlns:a16="http://schemas.microsoft.com/office/drawing/2014/main" id="{12F10137-5846-A261-EC37-F002306A7090}"/>
+                <a16:creationId xmlns:a16="http://schemas.microsoft.com/office/drawing/2014/main" id="{7CC618DA-660D-6D17-DB7A-50731CCC08A7}"/>
               </a:ext>
             </a:extLst>
           </p:cNvPr>
@@ -295,7 +295,7 @@
           <p:cNvPr id="6" name="スライド番号プレースホルダー 5">
             <a:extLst>
               <a:ext uri="{FF2B5EF4-FFF2-40B4-BE49-F238E27FC236}">
-                <a16:creationId xmlns:a16="http://schemas.microsoft.com/office/drawing/2014/main" id="{E835A9F2-205A-A969-AFAF-EC7C265E9066}"/>
+                <a16:creationId xmlns:a16="http://schemas.microsoft.com/office/drawing/2014/main" id="{A7064AA0-AAD7-DEC7-DF2A-FA99E214AD6D}"/>
               </a:ext>
             </a:extLst>
           </p:cNvPr>
@@ -311,7 +311,7 @@
           <a:bodyPr/>
           <a:lstStyle/>
           <a:p>
-            <a:fld id="{C0D520E9-7B49-49BF-B12B-E685C26A66D8}" type="slidenum">
+            <a:fld id="{47D55DD1-BB1D-475B-B8D9-3DEE81C2D692}" type="slidenum">
               <a:rPr kumimoji="1" lang="ja-JP" altLang="en-US" smtClean="0"/>
               <a:t>‹#›</a:t>
             </a:fld>
@@ -322,7 +322,7 @@
     </p:spTree>
     <p:extLst>
       <p:ext uri="{BB962C8B-B14F-4D97-AF65-F5344CB8AC3E}">
-        <p14:creationId xmlns:p14="http://schemas.microsoft.com/office/powerpoint/2010/main" val="1693979667"/>
+        <p14:creationId xmlns:p14="http://schemas.microsoft.com/office/powerpoint/2010/main" val="3065403184"/>
       </p:ext>
     </p:extLst>
   </p:cSld>
@@ -354,7 +354,7 @@
           <p:cNvPr id="2" name="タイトル 1">
             <a:extLst>
               <a:ext uri="{FF2B5EF4-FFF2-40B4-BE49-F238E27FC236}">
-                <a16:creationId xmlns:a16="http://schemas.microsoft.com/office/drawing/2014/main" id="{FE26DB60-CE24-8AF2-9E89-96602B74AB56}"/>
+                <a16:creationId xmlns:a16="http://schemas.microsoft.com/office/drawing/2014/main" id="{0E4D66D4-8616-C360-A25E-BC263CF0F9A5}"/>
               </a:ext>
             </a:extLst>
           </p:cNvPr>
@@ -382,7 +382,7 @@
           <p:cNvPr id="3" name="縦書きテキスト プレースホルダー 2">
             <a:extLst>
               <a:ext uri="{FF2B5EF4-FFF2-40B4-BE49-F238E27FC236}">
-                <a16:creationId xmlns:a16="http://schemas.microsoft.com/office/drawing/2014/main" id="{07EAA9F2-0ECE-0CD9-23BA-AA15DE95A30F}"/>
+                <a16:creationId xmlns:a16="http://schemas.microsoft.com/office/drawing/2014/main" id="{2FC79662-C295-C37A-78D5-EEC69276FED0}"/>
               </a:ext>
             </a:extLst>
           </p:cNvPr>
@@ -471,7 +471,7 @@
           <p:cNvPr id="4" name="日付プレースホルダー 3">
             <a:extLst>
               <a:ext uri="{FF2B5EF4-FFF2-40B4-BE49-F238E27FC236}">
-                <a16:creationId xmlns:a16="http://schemas.microsoft.com/office/drawing/2014/main" id="{64881B4D-C402-8CA9-0C96-705B379A258D}"/>
+                <a16:creationId xmlns:a16="http://schemas.microsoft.com/office/drawing/2014/main" id="{D05B7072-73D2-E0EB-4DF8-7F29468F86B7}"/>
               </a:ext>
             </a:extLst>
           </p:cNvPr>
@@ -487,7 +487,7 @@
           <a:bodyPr/>
           <a:lstStyle/>
           <a:p>
-            <a:fld id="{E0067E29-33DB-46FA-A4BF-55C2424EE3F1}" type="datetimeFigureOut">
+            <a:fld id="{A8E3BFF6-5743-4169-BBBD-C8E90BFC3283}" type="datetimeFigureOut">
               <a:rPr kumimoji="1" lang="ja-JP" altLang="en-US" smtClean="0"/>
               <a:t>2026/7/30</a:t>
             </a:fld>
@@ -500,7 +500,7 @@
           <p:cNvPr id="5" name="フッター プレースホルダー 4">
             <a:extLst>
               <a:ext uri="{FF2B5EF4-FFF2-40B4-BE49-F238E27FC236}">
-                <a16:creationId xmlns:a16="http://schemas.microsoft.com/office/drawing/2014/main" id="{529DE68A-0B20-2CB2-8D1A-37C7B635B793}"/>
+                <a16:creationId xmlns:a16="http://schemas.microsoft.com/office/drawing/2014/main" id="{BD4C48BA-9F1C-8FBF-3AE0-ADB1AE297732}"/>
               </a:ext>
             </a:extLst>
           </p:cNvPr>
@@ -525,7 +525,7 @@
           <p:cNvPr id="6" name="スライド番号プレースホルダー 5">
             <a:extLst>
               <a:ext uri="{FF2B5EF4-FFF2-40B4-BE49-F238E27FC236}">
-                <a16:creationId xmlns:a16="http://schemas.microsoft.com/office/drawing/2014/main" id="{BC561D9F-870F-DA26-101B-2BF035CEB4DD}"/>
+                <a16:creationId xmlns:a16="http://schemas.microsoft.com/office/drawing/2014/main" id="{5EC42541-50AE-B877-171C-70B4ECCC19D5}"/>
               </a:ext>
             </a:extLst>
           </p:cNvPr>
@@ -541,7 +541,7 @@
           <a:bodyPr/>
           <a:lstStyle/>
           <a:p>
-            <a:fld id="{C0D520E9-7B49-49BF-B12B-E685C26A66D8}" type="slidenum">
+            <a:fld id="{47D55DD1-BB1D-475B-B8D9-3DEE81C2D692}" type="slidenum">
               <a:rPr kumimoji="1" lang="ja-JP" altLang="en-US" smtClean="0"/>
               <a:t>‹#›</a:t>
             </a:fld>
@@ -552,7 +552,7 @@
     </p:spTree>
     <p:extLst>
       <p:ext uri="{BB962C8B-B14F-4D97-AF65-F5344CB8AC3E}">
-        <p14:creationId xmlns:p14="http://schemas.microsoft.com/office/powerpoint/2010/main" val="3733975433"/>
+        <p14:creationId xmlns:p14="http://schemas.microsoft.com/office/powerpoint/2010/main" val="2669022332"/>
       </p:ext>
     </p:extLst>
   </p:cSld>
@@ -584,7 +584,7 @@
           <p:cNvPr id="2" name="縦書きタイトル 1">
             <a:extLst>
               <a:ext uri="{FF2B5EF4-FFF2-40B4-BE49-F238E27FC236}">
-                <a16:creationId xmlns:a16="http://schemas.microsoft.com/office/drawing/2014/main" id="{F70FEBCF-C4DA-6334-0678-B056A1053BBC}"/>
+                <a16:creationId xmlns:a16="http://schemas.microsoft.com/office/drawing/2014/main" id="{B3E7F667-0053-9BB6-6BD0-80AEFDCECF98}"/>
               </a:ext>
             </a:extLst>
           </p:cNvPr>
@@ -617,7 +617,7 @@
           <p:cNvPr id="3" name="縦書きテキスト プレースホルダー 2">
             <a:extLst>
               <a:ext uri="{FF2B5EF4-FFF2-40B4-BE49-F238E27FC236}">
-                <a16:creationId xmlns:a16="http://schemas.microsoft.com/office/drawing/2014/main" id="{164FD69C-8E1C-150C-F8A7-F4473430D61C}"/>
+                <a16:creationId xmlns:a16="http://schemas.microsoft.com/office/drawing/2014/main" id="{C51F8B19-76BB-345C-4A7B-1AD191C2CCF0}"/>
               </a:ext>
             </a:extLst>
           </p:cNvPr>
@@ -711,7 +711,7 @@
           <p:cNvPr id="4" name="日付プレースホルダー 3">
             <a:extLst>
               <a:ext uri="{FF2B5EF4-FFF2-40B4-BE49-F238E27FC236}">
-                <a16:creationId xmlns:a16="http://schemas.microsoft.com/office/drawing/2014/main" id="{028B874C-29E5-2B44-B352-ACC7D4ADA837}"/>
+                <a16:creationId xmlns:a16="http://schemas.microsoft.com/office/drawing/2014/main" id="{8568796C-7067-2E99-83BA-A1906E78948D}"/>
               </a:ext>
             </a:extLst>
           </p:cNvPr>
@@ -727,7 +727,7 @@
           <a:bodyPr/>
           <a:lstStyle/>
           <a:p>
-            <a:fld id="{E0067E29-33DB-46FA-A4BF-55C2424EE3F1}" type="datetimeFigureOut">
+            <a:fld id="{A8E3BFF6-5743-4169-BBBD-C8E90BFC3283}" type="datetimeFigureOut">
               <a:rPr kumimoji="1" lang="ja-JP" altLang="en-US" smtClean="0"/>
               <a:t>2026/7/30</a:t>
             </a:fld>
@@ -740,7 +740,7 @@
           <p:cNvPr id="5" name="フッター プレースホルダー 4">
             <a:extLst>
               <a:ext uri="{FF2B5EF4-FFF2-40B4-BE49-F238E27FC236}">
-                <a16:creationId xmlns:a16="http://schemas.microsoft.com/office/drawing/2014/main" id="{9DE82611-EE8B-0807-1D1B-062B95087751}"/>
+                <a16:creationId xmlns:a16="http://schemas.microsoft.com/office/drawing/2014/main" id="{6D4FA369-94AA-24CA-6EF8-AFA51BCD59E3}"/>
               </a:ext>
             </a:extLst>
           </p:cNvPr>
@@ -765,7 +765,7 @@
           <p:cNvPr id="6" name="スライド番号プレースホルダー 5">
             <a:extLst>
               <a:ext uri="{FF2B5EF4-FFF2-40B4-BE49-F238E27FC236}">
-                <a16:creationId xmlns:a16="http://schemas.microsoft.com/office/drawing/2014/main" id="{F681DD9F-F742-2822-B838-AFE385A71B7A}"/>
+                <a16:creationId xmlns:a16="http://schemas.microsoft.com/office/drawing/2014/main" id="{BD5D261C-CE1F-692C-FBF4-B92296805635}"/>
               </a:ext>
             </a:extLst>
           </p:cNvPr>
@@ -781,7 +781,7 @@
           <a:bodyPr/>
           <a:lstStyle/>
           <a:p>
-            <a:fld id="{C0D520E9-7B49-49BF-B12B-E685C26A66D8}" type="slidenum">
+            <a:fld id="{47D55DD1-BB1D-475B-B8D9-3DEE81C2D692}" type="slidenum">
               <a:rPr kumimoji="1" lang="ja-JP" altLang="en-US" smtClean="0"/>
               <a:t>‹#›</a:t>
             </a:fld>
@@ -792,7 +792,7 @@
     </p:spTree>
     <p:extLst>
       <p:ext uri="{BB962C8B-B14F-4D97-AF65-F5344CB8AC3E}">
-        <p14:creationId xmlns:p14="http://schemas.microsoft.com/office/powerpoint/2010/main" val="3079831107"/>
+        <p14:creationId xmlns:p14="http://schemas.microsoft.com/office/powerpoint/2010/main" val="796713224"/>
       </p:ext>
     </p:extLst>
   </p:cSld>
@@ -824,7 +824,7 @@
           <p:cNvPr id="2" name="タイトル 1">
             <a:extLst>
               <a:ext uri="{FF2B5EF4-FFF2-40B4-BE49-F238E27FC236}">
-                <a16:creationId xmlns:a16="http://schemas.microsoft.com/office/drawing/2014/main" id="{8A0FC16C-B4EF-EB9B-63AD-8AD986B86CAA}"/>
+                <a16:creationId xmlns:a16="http://schemas.microsoft.com/office/drawing/2014/main" id="{868C32CE-133F-475E-213F-5D8737B9CC0B}"/>
               </a:ext>
             </a:extLst>
           </p:cNvPr>
@@ -852,7 +852,7 @@
           <p:cNvPr id="3" name="コンテンツ プレースホルダー 2">
             <a:extLst>
               <a:ext uri="{FF2B5EF4-FFF2-40B4-BE49-F238E27FC236}">
-                <a16:creationId xmlns:a16="http://schemas.microsoft.com/office/drawing/2014/main" id="{C5D878EA-D5E4-FFF8-D445-B7EDE23AD86D}"/>
+                <a16:creationId xmlns:a16="http://schemas.microsoft.com/office/drawing/2014/main" id="{F59002B5-CFE2-FA1A-0620-628298DD82C0}"/>
               </a:ext>
             </a:extLst>
           </p:cNvPr>
@@ -941,7 +941,7 @@
           <p:cNvPr id="4" name="日付プレースホルダー 3">
             <a:extLst>
               <a:ext uri="{FF2B5EF4-FFF2-40B4-BE49-F238E27FC236}">
-                <a16:creationId xmlns:a16="http://schemas.microsoft.com/office/drawing/2014/main" id="{2C606C2F-7117-1213-6BA1-763DF0FC8EE1}"/>
+                <a16:creationId xmlns:a16="http://schemas.microsoft.com/office/drawing/2014/main" id="{9A09C2EF-2151-1544-52E6-C2E8CE6A4946}"/>
               </a:ext>
             </a:extLst>
           </p:cNvPr>
@@ -957,7 +957,7 @@
           <a:bodyPr/>
           <a:lstStyle/>
           <a:p>
-            <a:fld id="{E0067E29-33DB-46FA-A4BF-55C2424EE3F1}" type="datetimeFigureOut">
+            <a:fld id="{A8E3BFF6-5743-4169-BBBD-C8E90BFC3283}" type="datetimeFigureOut">
               <a:rPr kumimoji="1" lang="ja-JP" altLang="en-US" smtClean="0"/>
               <a:t>2026/7/30</a:t>
             </a:fld>
@@ -970,7 +970,7 @@
           <p:cNvPr id="5" name="フッター プレースホルダー 4">
             <a:extLst>
               <a:ext uri="{FF2B5EF4-FFF2-40B4-BE49-F238E27FC236}">
-                <a16:creationId xmlns:a16="http://schemas.microsoft.com/office/drawing/2014/main" id="{A67F46FB-FDD2-1BC1-FB15-DA4AD870B1A9}"/>
+                <a16:creationId xmlns:a16="http://schemas.microsoft.com/office/drawing/2014/main" id="{9E0A69BF-1F02-AE87-4A27-DFEEB5AC0884}"/>
               </a:ext>
             </a:extLst>
           </p:cNvPr>
@@ -995,7 +995,7 @@
           <p:cNvPr id="6" name="スライド番号プレースホルダー 5">
             <a:extLst>
               <a:ext uri="{FF2B5EF4-FFF2-40B4-BE49-F238E27FC236}">
-                <a16:creationId xmlns:a16="http://schemas.microsoft.com/office/drawing/2014/main" id="{0D4B4555-B9FF-8BD6-5881-F3C00BE5C94B}"/>
+                <a16:creationId xmlns:a16="http://schemas.microsoft.com/office/drawing/2014/main" id="{96B5A232-5629-5D32-988B-2D8F02E2CDA7}"/>
               </a:ext>
             </a:extLst>
           </p:cNvPr>
@@ -1011,7 +1011,7 @@
           <a:bodyPr/>
           <a:lstStyle/>
           <a:p>
-            <a:fld id="{C0D520E9-7B49-49BF-B12B-E685C26A66D8}" type="slidenum">
+            <a:fld id="{47D55DD1-BB1D-475B-B8D9-3DEE81C2D692}" type="slidenum">
               <a:rPr kumimoji="1" lang="ja-JP" altLang="en-US" smtClean="0"/>
               <a:t>‹#›</a:t>
             </a:fld>
@@ -1022,7 +1022,7 @@
     </p:spTree>
     <p:extLst>
       <p:ext uri="{BB962C8B-B14F-4D97-AF65-F5344CB8AC3E}">
-        <p14:creationId xmlns:p14="http://schemas.microsoft.com/office/powerpoint/2010/main" val="729106517"/>
+        <p14:creationId xmlns:p14="http://schemas.microsoft.com/office/powerpoint/2010/main" val="3823788110"/>
       </p:ext>
     </p:extLst>
   </p:cSld>
@@ -1054,7 +1054,7 @@
           <p:cNvPr id="2" name="タイトル 1">
             <a:extLst>
               <a:ext uri="{FF2B5EF4-FFF2-40B4-BE49-F238E27FC236}">
-                <a16:creationId xmlns:a16="http://schemas.microsoft.com/office/drawing/2014/main" id="{85570939-8A97-4E4F-A312-2DCD2BD70586}"/>
+                <a16:creationId xmlns:a16="http://schemas.microsoft.com/office/drawing/2014/main" id="{C44E77A5-2CFE-EC5B-3842-DAD225C5DFC8}"/>
               </a:ext>
             </a:extLst>
           </p:cNvPr>
@@ -1091,7 +1091,7 @@
           <p:cNvPr id="3" name="テキスト プレースホルダー 2">
             <a:extLst>
               <a:ext uri="{FF2B5EF4-FFF2-40B4-BE49-F238E27FC236}">
-                <a16:creationId xmlns:a16="http://schemas.microsoft.com/office/drawing/2014/main" id="{BAFD9DAB-B1A3-C3D6-6A88-2FBFB3DFC849}"/>
+                <a16:creationId xmlns:a16="http://schemas.microsoft.com/office/drawing/2014/main" id="{6803AF74-37F1-7058-D224-8626DC227808}"/>
               </a:ext>
             </a:extLst>
           </p:cNvPr>
@@ -1216,7 +1216,7 @@
           <p:cNvPr id="4" name="日付プレースホルダー 3">
             <a:extLst>
               <a:ext uri="{FF2B5EF4-FFF2-40B4-BE49-F238E27FC236}">
-                <a16:creationId xmlns:a16="http://schemas.microsoft.com/office/drawing/2014/main" id="{54DBE9C1-F963-9E71-BFA7-3836F6C0DAAD}"/>
+                <a16:creationId xmlns:a16="http://schemas.microsoft.com/office/drawing/2014/main" id="{203E0DD6-FBD0-4186-C926-AA7604CC08EA}"/>
               </a:ext>
             </a:extLst>
           </p:cNvPr>
@@ -1232,7 +1232,7 @@
           <a:bodyPr/>
           <a:lstStyle/>
           <a:p>
-            <a:fld id="{E0067E29-33DB-46FA-A4BF-55C2424EE3F1}" type="datetimeFigureOut">
+            <a:fld id="{A8E3BFF6-5743-4169-BBBD-C8E90BFC3283}" type="datetimeFigureOut">
               <a:rPr kumimoji="1" lang="ja-JP" altLang="en-US" smtClean="0"/>
               <a:t>2026/7/30</a:t>
             </a:fld>
@@ -1245,7 +1245,7 @@
           <p:cNvPr id="5" name="フッター プレースホルダー 4">
             <a:extLst>
               <a:ext uri="{FF2B5EF4-FFF2-40B4-BE49-F238E27FC236}">
-                <a16:creationId xmlns:a16="http://schemas.microsoft.com/office/drawing/2014/main" id="{BE32D56E-DC59-77BB-BC3A-FEE07B2F5512}"/>
+                <a16:creationId xmlns:a16="http://schemas.microsoft.com/office/drawing/2014/main" id="{45BFA539-9376-1AB5-4E4A-E2E807208E0E}"/>
               </a:ext>
             </a:extLst>
           </p:cNvPr>
@@ -1270,7 +1270,7 @@
           <p:cNvPr id="6" name="スライド番号プレースホルダー 5">
             <a:extLst>
               <a:ext uri="{FF2B5EF4-FFF2-40B4-BE49-F238E27FC236}">
-                <a16:creationId xmlns:a16="http://schemas.microsoft.com/office/drawing/2014/main" id="{C90A610A-BA94-DA30-3310-C3745062F51B}"/>
+                <a16:creationId xmlns:a16="http://schemas.microsoft.com/office/drawing/2014/main" id="{D444BEBA-BB75-8CC1-6B0A-C0FB6B84CA68}"/>
               </a:ext>
             </a:extLst>
           </p:cNvPr>
@@ -1286,7 +1286,7 @@
           <a:bodyPr/>
           <a:lstStyle/>
           <a:p>
-            <a:fld id="{C0D520E9-7B49-49BF-B12B-E685C26A66D8}" type="slidenum">
+            <a:fld id="{47D55DD1-BB1D-475B-B8D9-3DEE81C2D692}" type="slidenum">
               <a:rPr kumimoji="1" lang="ja-JP" altLang="en-US" smtClean="0"/>
               <a:t>‹#›</a:t>
             </a:fld>
@@ -1297,7 +1297,7 @@
     </p:spTree>
     <p:extLst>
       <p:ext uri="{BB962C8B-B14F-4D97-AF65-F5344CB8AC3E}">
-        <p14:creationId xmlns:p14="http://schemas.microsoft.com/office/powerpoint/2010/main" val="2905567428"/>
+        <p14:creationId xmlns:p14="http://schemas.microsoft.com/office/powerpoint/2010/main" val="1873622816"/>
       </p:ext>
     </p:extLst>
   </p:cSld>
@@ -1329,7 +1329,7 @@
           <p:cNvPr id="2" name="タイトル 1">
             <a:extLst>
               <a:ext uri="{FF2B5EF4-FFF2-40B4-BE49-F238E27FC236}">
-                <a16:creationId xmlns:a16="http://schemas.microsoft.com/office/drawing/2014/main" id="{09C66EE3-674D-D39F-1B9E-41847EC68B55}"/>
+                <a16:creationId xmlns:a16="http://schemas.microsoft.com/office/drawing/2014/main" id="{7CE982F5-980D-4AD7-12C3-C0A30A3AD078}"/>
               </a:ext>
             </a:extLst>
           </p:cNvPr>
@@ -1357,7 +1357,7 @@
           <p:cNvPr id="3" name="コンテンツ プレースホルダー 2">
             <a:extLst>
               <a:ext uri="{FF2B5EF4-FFF2-40B4-BE49-F238E27FC236}">
-                <a16:creationId xmlns:a16="http://schemas.microsoft.com/office/drawing/2014/main" id="{AE3FF41C-9D13-61D2-9FEE-7AEA3C8EB19B}"/>
+                <a16:creationId xmlns:a16="http://schemas.microsoft.com/office/drawing/2014/main" id="{1A62EE11-21EF-3ED6-CC8F-EE09F0E7F127}"/>
               </a:ext>
             </a:extLst>
           </p:cNvPr>
@@ -1451,7 +1451,7 @@
           <p:cNvPr id="4" name="コンテンツ プレースホルダー 3">
             <a:extLst>
               <a:ext uri="{FF2B5EF4-FFF2-40B4-BE49-F238E27FC236}">
-                <a16:creationId xmlns:a16="http://schemas.microsoft.com/office/drawing/2014/main" id="{CDF4577A-3481-CE7A-A8E4-6CFF1CABD6A6}"/>
+                <a16:creationId xmlns:a16="http://schemas.microsoft.com/office/drawing/2014/main" id="{9BB244D9-0967-6E45-F1FC-3812C465E1A8}"/>
               </a:ext>
             </a:extLst>
           </p:cNvPr>
@@ -1545,7 +1545,7 @@
           <p:cNvPr id="5" name="日付プレースホルダー 4">
             <a:extLst>
               <a:ext uri="{FF2B5EF4-FFF2-40B4-BE49-F238E27FC236}">
-                <a16:creationId xmlns:a16="http://schemas.microsoft.com/office/drawing/2014/main" id="{9BF04C91-DCF1-275F-8264-9457732AB318}"/>
+                <a16:creationId xmlns:a16="http://schemas.microsoft.com/office/drawing/2014/main" id="{54B9D432-F1F6-68B4-049A-D48ACE6D0325}"/>
               </a:ext>
             </a:extLst>
           </p:cNvPr>
@@ -1561,7 +1561,7 @@
           <a:bodyPr/>
           <a:lstStyle/>
           <a:p>
-            <a:fld id="{E0067E29-33DB-46FA-A4BF-55C2424EE3F1}" type="datetimeFigureOut">
+            <a:fld id="{A8E3BFF6-5743-4169-BBBD-C8E90BFC3283}" type="datetimeFigureOut">
               <a:rPr kumimoji="1" lang="ja-JP" altLang="en-US" smtClean="0"/>
               <a:t>2026/7/30</a:t>
             </a:fld>
@@ -1574,7 +1574,7 @@
           <p:cNvPr id="6" name="フッター プレースホルダー 5">
             <a:extLst>
               <a:ext uri="{FF2B5EF4-FFF2-40B4-BE49-F238E27FC236}">
-                <a16:creationId xmlns:a16="http://schemas.microsoft.com/office/drawing/2014/main" id="{434A82B6-A191-C635-A2A5-BECFD96D9350}"/>
+                <a16:creationId xmlns:a16="http://schemas.microsoft.com/office/drawing/2014/main" id="{29E0A6B1-12C8-F868-10D2-4A56877ACAF6}"/>
               </a:ext>
             </a:extLst>
           </p:cNvPr>
@@ -1599,7 +1599,7 @@
           <p:cNvPr id="7" name="スライド番号プレースホルダー 6">
             <a:extLst>
               <a:ext uri="{FF2B5EF4-FFF2-40B4-BE49-F238E27FC236}">
-                <a16:creationId xmlns:a16="http://schemas.microsoft.com/office/drawing/2014/main" id="{76F7A22F-9CD6-204B-4711-1ADC78645949}"/>
+                <a16:creationId xmlns:a16="http://schemas.microsoft.com/office/drawing/2014/main" id="{82B79AFE-958C-D08C-0AB6-2F939EF1CA8A}"/>
               </a:ext>
             </a:extLst>
           </p:cNvPr>
@@ -1615,7 +1615,7 @@
           <a:bodyPr/>
           <a:lstStyle/>
           <a:p>
-            <a:fld id="{C0D520E9-7B49-49BF-B12B-E685C26A66D8}" type="slidenum">
+            <a:fld id="{47D55DD1-BB1D-475B-B8D9-3DEE81C2D692}" type="slidenum">
               <a:rPr kumimoji="1" lang="ja-JP" altLang="en-US" smtClean="0"/>
               <a:t>‹#›</a:t>
             </a:fld>
@@ -1626,7 +1626,7 @@
     </p:spTree>
     <p:extLst>
       <p:ext uri="{BB962C8B-B14F-4D97-AF65-F5344CB8AC3E}">
-        <p14:creationId xmlns:p14="http://schemas.microsoft.com/office/powerpoint/2010/main" val="2152474604"/>
+        <p14:creationId xmlns:p14="http://schemas.microsoft.com/office/powerpoint/2010/main" val="1622283855"/>
       </p:ext>
     </p:extLst>
   </p:cSld>
@@ -1658,7 +1658,7 @@
           <p:cNvPr id="2" name="タイトル 1">
             <a:extLst>
               <a:ext uri="{FF2B5EF4-FFF2-40B4-BE49-F238E27FC236}">
-                <a16:creationId xmlns:a16="http://schemas.microsoft.com/office/drawing/2014/main" id="{A54AE07B-EF59-B4F0-6985-6315A4D527AE}"/>
+                <a16:creationId xmlns:a16="http://schemas.microsoft.com/office/drawing/2014/main" id="{F23BD7D6-6BDE-6533-6EC1-437E862BADB3}"/>
               </a:ext>
             </a:extLst>
           </p:cNvPr>
@@ -1691,7 +1691,7 @@
           <p:cNvPr id="3" name="テキスト プレースホルダー 2">
             <a:extLst>
               <a:ext uri="{FF2B5EF4-FFF2-40B4-BE49-F238E27FC236}">
-                <a16:creationId xmlns:a16="http://schemas.microsoft.com/office/drawing/2014/main" id="{172D603E-8FD8-02BC-2B5C-037EA074B26D}"/>
+                <a16:creationId xmlns:a16="http://schemas.microsoft.com/office/drawing/2014/main" id="{AD2679BE-66A6-589D-7F1E-29E8F94E1DD8}"/>
               </a:ext>
             </a:extLst>
           </p:cNvPr>
@@ -1762,7 +1762,7 @@
           <p:cNvPr id="4" name="コンテンツ プレースホルダー 3">
             <a:extLst>
               <a:ext uri="{FF2B5EF4-FFF2-40B4-BE49-F238E27FC236}">
-                <a16:creationId xmlns:a16="http://schemas.microsoft.com/office/drawing/2014/main" id="{0F9F173D-CEEE-9CDB-07E3-03D7F25DC1FF}"/>
+                <a16:creationId xmlns:a16="http://schemas.microsoft.com/office/drawing/2014/main" id="{6F7AB921-3FD7-545F-84F1-C9DDD8EA4D42}"/>
               </a:ext>
             </a:extLst>
           </p:cNvPr>
@@ -1856,7 +1856,7 @@
           <p:cNvPr id="5" name="テキスト プレースホルダー 4">
             <a:extLst>
               <a:ext uri="{FF2B5EF4-FFF2-40B4-BE49-F238E27FC236}">
-                <a16:creationId xmlns:a16="http://schemas.microsoft.com/office/drawing/2014/main" id="{735DD5AD-5059-3E4E-C8A7-D78AB2E91D30}"/>
+                <a16:creationId xmlns:a16="http://schemas.microsoft.com/office/drawing/2014/main" id="{73414E0B-1545-6DD9-BCE5-99698DC8D101}"/>
               </a:ext>
             </a:extLst>
           </p:cNvPr>
@@ -1927,7 +1927,7 @@
           <p:cNvPr id="6" name="コンテンツ プレースホルダー 5">
             <a:extLst>
               <a:ext uri="{FF2B5EF4-FFF2-40B4-BE49-F238E27FC236}">
-                <a16:creationId xmlns:a16="http://schemas.microsoft.com/office/drawing/2014/main" id="{2DC4E906-57A3-E080-9335-D936D3822BC7}"/>
+                <a16:creationId xmlns:a16="http://schemas.microsoft.com/office/drawing/2014/main" id="{77134377-BC02-943F-FFF0-16D9EDF5AE8C}"/>
               </a:ext>
             </a:extLst>
           </p:cNvPr>
@@ -2021,7 +2021,7 @@
           <p:cNvPr id="7" name="日付プレースホルダー 6">
             <a:extLst>
               <a:ext uri="{FF2B5EF4-FFF2-40B4-BE49-F238E27FC236}">
-                <a16:creationId xmlns:a16="http://schemas.microsoft.com/office/drawing/2014/main" id="{8BC784D3-3B6A-B58F-585B-2BEEE8EF2CA3}"/>
+                <a16:creationId xmlns:a16="http://schemas.microsoft.com/office/drawing/2014/main" id="{01C833D0-1028-E130-7648-3420D8741A2E}"/>
               </a:ext>
             </a:extLst>
           </p:cNvPr>
@@ -2037,7 +2037,7 @@
           <a:bodyPr/>
           <a:lstStyle/>
           <a:p>
-            <a:fld id="{E0067E29-33DB-46FA-A4BF-55C2424EE3F1}" type="datetimeFigureOut">
+            <a:fld id="{A8E3BFF6-5743-4169-BBBD-C8E90BFC3283}" type="datetimeFigureOut">
               <a:rPr kumimoji="1" lang="ja-JP" altLang="en-US" smtClean="0"/>
               <a:t>2026/7/30</a:t>
             </a:fld>
@@ -2050,7 +2050,7 @@
           <p:cNvPr id="8" name="フッター プレースホルダー 7">
             <a:extLst>
               <a:ext uri="{FF2B5EF4-FFF2-40B4-BE49-F238E27FC236}">
-                <a16:creationId xmlns:a16="http://schemas.microsoft.com/office/drawing/2014/main" id="{E8E77086-3C81-4CA6-6540-AB45C9433D1B}"/>
+                <a16:creationId xmlns:a16="http://schemas.microsoft.com/office/drawing/2014/main" id="{9E67BB47-F9F5-F051-1DD6-1913E5897CA4}"/>
               </a:ext>
             </a:extLst>
           </p:cNvPr>
@@ -2075,7 +2075,7 @@
           <p:cNvPr id="9" name="スライド番号プレースホルダー 8">
             <a:extLst>
               <a:ext uri="{FF2B5EF4-FFF2-40B4-BE49-F238E27FC236}">
-                <a16:creationId xmlns:a16="http://schemas.microsoft.com/office/drawing/2014/main" id="{6204D54F-EB9B-B009-6B70-CDF25CEFA505}"/>
+                <a16:creationId xmlns:a16="http://schemas.microsoft.com/office/drawing/2014/main" id="{C9B22ECF-C219-5AFC-5E62-944963FEFA80}"/>
               </a:ext>
             </a:extLst>
           </p:cNvPr>
@@ -2091,7 +2091,7 @@
           <a:bodyPr/>
           <a:lstStyle/>
           <a:p>
-            <a:fld id="{C0D520E9-7B49-49BF-B12B-E685C26A66D8}" type="slidenum">
+            <a:fld id="{47D55DD1-BB1D-475B-B8D9-3DEE81C2D692}" type="slidenum">
               <a:rPr kumimoji="1" lang="ja-JP" altLang="en-US" smtClean="0"/>
               <a:t>‹#›</a:t>
             </a:fld>
@@ -2102,7 +2102,7 @@
     </p:spTree>
     <p:extLst>
       <p:ext uri="{BB962C8B-B14F-4D97-AF65-F5344CB8AC3E}">
-        <p14:creationId xmlns:p14="http://schemas.microsoft.com/office/powerpoint/2010/main" val="72824900"/>
+        <p14:creationId xmlns:p14="http://schemas.microsoft.com/office/powerpoint/2010/main" val="2454782987"/>
       </p:ext>
     </p:extLst>
   </p:cSld>
@@ -2134,7 +2134,7 @@
           <p:cNvPr id="2" name="タイトル 1">
             <a:extLst>
               <a:ext uri="{FF2B5EF4-FFF2-40B4-BE49-F238E27FC236}">
-                <a16:creationId xmlns:a16="http://schemas.microsoft.com/office/drawing/2014/main" id="{787013DA-9461-4D3C-4A08-8B74DE4B4C4C}"/>
+                <a16:creationId xmlns:a16="http://schemas.microsoft.com/office/drawing/2014/main" id="{2C225A9D-FFEF-4DBC-C6E3-ABE7B4F340B8}"/>
               </a:ext>
             </a:extLst>
           </p:cNvPr>
@@ -2162,7 +2162,7 @@
           <p:cNvPr id="3" name="日付プレースホルダー 2">
             <a:extLst>
               <a:ext uri="{FF2B5EF4-FFF2-40B4-BE49-F238E27FC236}">
-                <a16:creationId xmlns:a16="http://schemas.microsoft.com/office/drawing/2014/main" id="{9B4BA557-43AF-9E18-44FE-7AB905C59F0E}"/>
+                <a16:creationId xmlns:a16="http://schemas.microsoft.com/office/drawing/2014/main" id="{3034D1CC-CAF6-B72B-E4DC-F4FAB2CF0EC0}"/>
               </a:ext>
             </a:extLst>
           </p:cNvPr>
@@ -2178,7 +2178,7 @@
           <a:bodyPr/>
           <a:lstStyle/>
           <a:p>
-            <a:fld id="{E0067E29-33DB-46FA-A4BF-55C2424EE3F1}" type="datetimeFigureOut">
+            <a:fld id="{A8E3BFF6-5743-4169-BBBD-C8E90BFC3283}" type="datetimeFigureOut">
               <a:rPr kumimoji="1" lang="ja-JP" altLang="en-US" smtClean="0"/>
               <a:t>2026/7/30</a:t>
             </a:fld>
@@ -2191,7 +2191,7 @@
           <p:cNvPr id="4" name="フッター プレースホルダー 3">
             <a:extLst>
               <a:ext uri="{FF2B5EF4-FFF2-40B4-BE49-F238E27FC236}">
-                <a16:creationId xmlns:a16="http://schemas.microsoft.com/office/drawing/2014/main" id="{DA861C72-BE0F-8DFE-91AD-CF33F4F7D4C2}"/>
+                <a16:creationId xmlns:a16="http://schemas.microsoft.com/office/drawing/2014/main" id="{ED6A763D-E7E1-0677-EBFB-4FB835CBBCDE}"/>
               </a:ext>
             </a:extLst>
           </p:cNvPr>
@@ -2216,7 +2216,7 @@
           <p:cNvPr id="5" name="スライド番号プレースホルダー 4">
             <a:extLst>
               <a:ext uri="{FF2B5EF4-FFF2-40B4-BE49-F238E27FC236}">
-                <a16:creationId xmlns:a16="http://schemas.microsoft.com/office/drawing/2014/main" id="{38D0CE55-9E89-58AF-B18A-D44E3174A31C}"/>
+                <a16:creationId xmlns:a16="http://schemas.microsoft.com/office/drawing/2014/main" id="{AA4D29C0-64F8-A283-0D80-635E18DBD80A}"/>
               </a:ext>
             </a:extLst>
           </p:cNvPr>
@@ -2232,7 +2232,7 @@
           <a:bodyPr/>
           <a:lstStyle/>
           <a:p>
-            <a:fld id="{C0D520E9-7B49-49BF-B12B-E685C26A66D8}" type="slidenum">
+            <a:fld id="{47D55DD1-BB1D-475B-B8D9-3DEE81C2D692}" type="slidenum">
               <a:rPr kumimoji="1" lang="ja-JP" altLang="en-US" smtClean="0"/>
               <a:t>‹#›</a:t>
             </a:fld>
@@ -2243,7 +2243,7 @@
     </p:spTree>
     <p:extLst>
       <p:ext uri="{BB962C8B-B14F-4D97-AF65-F5344CB8AC3E}">
-        <p14:creationId xmlns:p14="http://schemas.microsoft.com/office/powerpoint/2010/main" val="3748118189"/>
+        <p14:creationId xmlns:p14="http://schemas.microsoft.com/office/powerpoint/2010/main" val="1563213975"/>
       </p:ext>
     </p:extLst>
   </p:cSld>
@@ -2275,7 +2275,7 @@
           <p:cNvPr id="2" name="日付プレースホルダー 1">
             <a:extLst>
               <a:ext uri="{FF2B5EF4-FFF2-40B4-BE49-F238E27FC236}">
-                <a16:creationId xmlns:a16="http://schemas.microsoft.com/office/drawing/2014/main" id="{56FE5FD6-4595-2BDB-8F7B-2A3AFAA4C455}"/>
+                <a16:creationId xmlns:a16="http://schemas.microsoft.com/office/drawing/2014/main" id="{FBABC494-B131-5594-89EB-1CCD5B4B7114}"/>
               </a:ext>
             </a:extLst>
           </p:cNvPr>
@@ -2291,7 +2291,7 @@
           <a:bodyPr/>
           <a:lstStyle/>
           <a:p>
-            <a:fld id="{E0067E29-33DB-46FA-A4BF-55C2424EE3F1}" type="datetimeFigureOut">
+            <a:fld id="{A8E3BFF6-5743-4169-BBBD-C8E90BFC3283}" type="datetimeFigureOut">
               <a:rPr kumimoji="1" lang="ja-JP" altLang="en-US" smtClean="0"/>
               <a:t>2026/7/30</a:t>
             </a:fld>
@@ -2304,7 +2304,7 @@
           <p:cNvPr id="3" name="フッター プレースホルダー 2">
             <a:extLst>
               <a:ext uri="{FF2B5EF4-FFF2-40B4-BE49-F238E27FC236}">
-                <a16:creationId xmlns:a16="http://schemas.microsoft.com/office/drawing/2014/main" id="{4196CE8D-7873-454A-1C1B-A56A7B3EB60B}"/>
+                <a16:creationId xmlns:a16="http://schemas.microsoft.com/office/drawing/2014/main" id="{0E2246BE-BED5-A051-A8B2-704708FD88F8}"/>
               </a:ext>
             </a:extLst>
           </p:cNvPr>
@@ -2329,7 +2329,7 @@
           <p:cNvPr id="4" name="スライド番号プレースホルダー 3">
             <a:extLst>
               <a:ext uri="{FF2B5EF4-FFF2-40B4-BE49-F238E27FC236}">
-                <a16:creationId xmlns:a16="http://schemas.microsoft.com/office/drawing/2014/main" id="{7CE5FBAF-E1B2-2901-3FBF-ED7D3D5DE679}"/>
+                <a16:creationId xmlns:a16="http://schemas.microsoft.com/office/drawing/2014/main" id="{C75B87A2-E824-D84D-8BE3-A5D7C3BD52ED}"/>
               </a:ext>
             </a:extLst>
           </p:cNvPr>
@@ -2345,7 +2345,7 @@
           <a:bodyPr/>
           <a:lstStyle/>
           <a:p>
-            <a:fld id="{C0D520E9-7B49-49BF-B12B-E685C26A66D8}" type="slidenum">
+            <a:fld id="{47D55DD1-BB1D-475B-B8D9-3DEE81C2D692}" type="slidenum">
               <a:rPr kumimoji="1" lang="ja-JP" altLang="en-US" smtClean="0"/>
               <a:t>‹#›</a:t>
             </a:fld>
@@ -2356,7 +2356,7 @@
     </p:spTree>
     <p:extLst>
       <p:ext uri="{BB962C8B-B14F-4D97-AF65-F5344CB8AC3E}">
-        <p14:creationId xmlns:p14="http://schemas.microsoft.com/office/powerpoint/2010/main" val="4178113645"/>
+        <p14:creationId xmlns:p14="http://schemas.microsoft.com/office/powerpoint/2010/main" val="77831801"/>
       </p:ext>
     </p:extLst>
   </p:cSld>
@@ -2388,7 +2388,7 @@
           <p:cNvPr id="2" name="タイトル 1">
             <a:extLst>
               <a:ext uri="{FF2B5EF4-FFF2-40B4-BE49-F238E27FC236}">
-                <a16:creationId xmlns:a16="http://schemas.microsoft.com/office/drawing/2014/main" id="{F91C4399-BC1E-951F-BC2E-9D2805193872}"/>
+                <a16:creationId xmlns:a16="http://schemas.microsoft.com/office/drawing/2014/main" id="{DF7403EC-26EE-A664-708D-B505F6CA1E4D}"/>
               </a:ext>
             </a:extLst>
           </p:cNvPr>
@@ -2425,7 +2425,7 @@
           <p:cNvPr id="3" name="コンテンツ プレースホルダー 2">
             <a:extLst>
               <a:ext uri="{FF2B5EF4-FFF2-40B4-BE49-F238E27FC236}">
-                <a16:creationId xmlns:a16="http://schemas.microsoft.com/office/drawing/2014/main" id="{C3DF3A3E-8328-B605-A375-BE78DB21CEAE}"/>
+                <a16:creationId xmlns:a16="http://schemas.microsoft.com/office/drawing/2014/main" id="{FF031DBD-F50E-91F1-3355-C8ABB6AD3B75}"/>
               </a:ext>
             </a:extLst>
           </p:cNvPr>
@@ -2547,7 +2547,7 @@
           <p:cNvPr id="4" name="テキスト プレースホルダー 3">
             <a:extLst>
               <a:ext uri="{FF2B5EF4-FFF2-40B4-BE49-F238E27FC236}">
-                <a16:creationId xmlns:a16="http://schemas.microsoft.com/office/drawing/2014/main" id="{F4D894D1-0360-C212-DF93-D2342A81DF09}"/>
+                <a16:creationId xmlns:a16="http://schemas.microsoft.com/office/drawing/2014/main" id="{F5E272D1-A44D-425A-0C01-17EB32CE1C9C}"/>
               </a:ext>
             </a:extLst>
           </p:cNvPr>
@@ -2618,7 +2618,7 @@
           <p:cNvPr id="5" name="日付プレースホルダー 4">
             <a:extLst>
               <a:ext uri="{FF2B5EF4-FFF2-40B4-BE49-F238E27FC236}">
-                <a16:creationId xmlns:a16="http://schemas.microsoft.com/office/drawing/2014/main" id="{18406207-6136-DB14-4F16-5C397B73D55E}"/>
+                <a16:creationId xmlns:a16="http://schemas.microsoft.com/office/drawing/2014/main" id="{A95761EA-9672-0015-27E5-347BF57C9FC9}"/>
               </a:ext>
             </a:extLst>
           </p:cNvPr>
@@ -2634,7 +2634,7 @@
           <a:bodyPr/>
           <a:lstStyle/>
           <a:p>
-            <a:fld id="{E0067E29-33DB-46FA-A4BF-55C2424EE3F1}" type="datetimeFigureOut">
+            <a:fld id="{A8E3BFF6-5743-4169-BBBD-C8E90BFC3283}" type="datetimeFigureOut">
               <a:rPr kumimoji="1" lang="ja-JP" altLang="en-US" smtClean="0"/>
               <a:t>2026/7/30</a:t>
             </a:fld>
@@ -2647,7 +2647,7 @@
           <p:cNvPr id="6" name="フッター プレースホルダー 5">
             <a:extLst>
               <a:ext uri="{FF2B5EF4-FFF2-40B4-BE49-F238E27FC236}">
-                <a16:creationId xmlns:a16="http://schemas.microsoft.com/office/drawing/2014/main" id="{816C6738-91DF-A47C-215D-5DFA9C9A9F64}"/>
+                <a16:creationId xmlns:a16="http://schemas.microsoft.com/office/drawing/2014/main" id="{C78FE406-5A82-5D73-80A9-75FAB224EC22}"/>
               </a:ext>
             </a:extLst>
           </p:cNvPr>
@@ -2672,7 +2672,7 @@
           <p:cNvPr id="7" name="スライド番号プレースホルダー 6">
             <a:extLst>
               <a:ext uri="{FF2B5EF4-FFF2-40B4-BE49-F238E27FC236}">
-                <a16:creationId xmlns:a16="http://schemas.microsoft.com/office/drawing/2014/main" id="{E183331D-B88B-7E17-F211-9DE40CBAB82A}"/>
+                <a16:creationId xmlns:a16="http://schemas.microsoft.com/office/drawing/2014/main" id="{DFE1F757-1913-304F-775A-4482D1046622}"/>
               </a:ext>
             </a:extLst>
           </p:cNvPr>
@@ -2688,7 +2688,7 @@
           <a:bodyPr/>
           <a:lstStyle/>
           <a:p>
-            <a:fld id="{C0D520E9-7B49-49BF-B12B-E685C26A66D8}" type="slidenum">
+            <a:fld id="{47D55DD1-BB1D-475B-B8D9-3DEE81C2D692}" type="slidenum">
               <a:rPr kumimoji="1" lang="ja-JP" altLang="en-US" smtClean="0"/>
               <a:t>‹#›</a:t>
             </a:fld>
@@ -2699,7 +2699,7 @@
     </p:spTree>
     <p:extLst>
       <p:ext uri="{BB962C8B-B14F-4D97-AF65-F5344CB8AC3E}">
-        <p14:creationId xmlns:p14="http://schemas.microsoft.com/office/powerpoint/2010/main" val="2475604194"/>
+        <p14:creationId xmlns:p14="http://schemas.microsoft.com/office/powerpoint/2010/main" val="1754906475"/>
       </p:ext>
     </p:extLst>
   </p:cSld>
@@ -2731,7 +2731,7 @@
           <p:cNvPr id="2" name="タイトル 1">
             <a:extLst>
               <a:ext uri="{FF2B5EF4-FFF2-40B4-BE49-F238E27FC236}">
-                <a16:creationId xmlns:a16="http://schemas.microsoft.com/office/drawing/2014/main" id="{CAA94901-B349-D59E-0C23-6D5812D1861F}"/>
+                <a16:creationId xmlns:a16="http://schemas.microsoft.com/office/drawing/2014/main" id="{F2274CE5-2146-F5EE-B9B7-D87EF3A3C7E7}"/>
               </a:ext>
             </a:extLst>
           </p:cNvPr>
@@ -2768,7 +2768,7 @@
           <p:cNvPr id="3" name="図プレースホルダー 2">
             <a:extLst>
               <a:ext uri="{FF2B5EF4-FFF2-40B4-BE49-F238E27FC236}">
-                <a16:creationId xmlns:a16="http://schemas.microsoft.com/office/drawing/2014/main" id="{2D16DD47-76AB-1801-00E4-6A4D86CE770C}"/>
+                <a16:creationId xmlns:a16="http://schemas.microsoft.com/office/drawing/2014/main" id="{710D4F05-1607-9BA5-DA10-37797619DC9A}"/>
               </a:ext>
             </a:extLst>
           </p:cNvPr>
@@ -2835,7 +2835,7 @@
           <p:cNvPr id="4" name="テキスト プレースホルダー 3">
             <a:extLst>
               <a:ext uri="{FF2B5EF4-FFF2-40B4-BE49-F238E27FC236}">
-                <a16:creationId xmlns:a16="http://schemas.microsoft.com/office/drawing/2014/main" id="{5DC52D2B-5F86-D585-CBB9-70C60F56A818}"/>
+                <a16:creationId xmlns:a16="http://schemas.microsoft.com/office/drawing/2014/main" id="{F85E59BE-D9BA-2989-070F-7120448EDC1D}"/>
               </a:ext>
             </a:extLst>
           </p:cNvPr>
@@ -2906,7 +2906,7 @@
           <p:cNvPr id="5" name="日付プレースホルダー 4">
             <a:extLst>
               <a:ext uri="{FF2B5EF4-FFF2-40B4-BE49-F238E27FC236}">
-                <a16:creationId xmlns:a16="http://schemas.microsoft.com/office/drawing/2014/main" id="{F567732B-8C35-4C9A-1FBF-A0B7A425B803}"/>
+                <a16:creationId xmlns:a16="http://schemas.microsoft.com/office/drawing/2014/main" id="{CB8CE8D2-F32A-3999-82AF-5620260830F7}"/>
               </a:ext>
             </a:extLst>
           </p:cNvPr>
@@ -2922,7 +2922,7 @@
           <a:bodyPr/>
           <a:lstStyle/>
           <a:p>
-            <a:fld id="{E0067E29-33DB-46FA-A4BF-55C2424EE3F1}" type="datetimeFigureOut">
+            <a:fld id="{A8E3BFF6-5743-4169-BBBD-C8E90BFC3283}" type="datetimeFigureOut">
               <a:rPr kumimoji="1" lang="ja-JP" altLang="en-US" smtClean="0"/>
               <a:t>2026/7/30</a:t>
             </a:fld>
@@ -2935,7 +2935,7 @@
           <p:cNvPr id="6" name="フッター プレースホルダー 5">
             <a:extLst>
               <a:ext uri="{FF2B5EF4-FFF2-40B4-BE49-F238E27FC236}">
-                <a16:creationId xmlns:a16="http://schemas.microsoft.com/office/drawing/2014/main" id="{A3ECD007-C6D0-EE4A-CA3F-06815F79BD29}"/>
+                <a16:creationId xmlns:a16="http://schemas.microsoft.com/office/drawing/2014/main" id="{580CF4B8-5A2C-9B8E-4B27-F0B467891E58}"/>
               </a:ext>
             </a:extLst>
           </p:cNvPr>
@@ -2960,7 +2960,7 @@
           <p:cNvPr id="7" name="スライド番号プレースホルダー 6">
             <a:extLst>
               <a:ext uri="{FF2B5EF4-FFF2-40B4-BE49-F238E27FC236}">
-                <a16:creationId xmlns:a16="http://schemas.microsoft.com/office/drawing/2014/main" id="{AE7294E8-3152-40DC-58EE-2A83194D3A9E}"/>
+                <a16:creationId xmlns:a16="http://schemas.microsoft.com/office/drawing/2014/main" id="{F8366AFD-8C52-42FF-1C4E-9EE8F40692EE}"/>
               </a:ext>
             </a:extLst>
           </p:cNvPr>
@@ -2976,7 +2976,7 @@
           <a:bodyPr/>
           <a:lstStyle/>
           <a:p>
-            <a:fld id="{C0D520E9-7B49-49BF-B12B-E685C26A66D8}" type="slidenum">
+            <a:fld id="{47D55DD1-BB1D-475B-B8D9-3DEE81C2D692}" type="slidenum">
               <a:rPr kumimoji="1" lang="ja-JP" altLang="en-US" smtClean="0"/>
               <a:t>‹#›</a:t>
             </a:fld>
@@ -2987,7 +2987,7 @@
     </p:spTree>
     <p:extLst>
       <p:ext uri="{BB962C8B-B14F-4D97-AF65-F5344CB8AC3E}">
-        <p14:creationId xmlns:p14="http://schemas.microsoft.com/office/powerpoint/2010/main" val="3667739650"/>
+        <p14:creationId xmlns:p14="http://schemas.microsoft.com/office/powerpoint/2010/main" val="427318371"/>
       </p:ext>
     </p:extLst>
   </p:cSld>
@@ -3024,7 +3024,7 @@
           <p:cNvPr id="2" name="タイトル プレースホルダー 1">
             <a:extLst>
               <a:ext uri="{FF2B5EF4-FFF2-40B4-BE49-F238E27FC236}">
-                <a16:creationId xmlns:a16="http://schemas.microsoft.com/office/drawing/2014/main" id="{D110A3E6-040A-6184-3333-A6989448E1EA}"/>
+                <a16:creationId xmlns:a16="http://schemas.microsoft.com/office/drawing/2014/main" id="{6BBC7847-8FF4-47E3-29E9-7F839FE0DF3C}"/>
               </a:ext>
             </a:extLst>
           </p:cNvPr>
@@ -3062,7 +3062,7 @@
           <p:cNvPr id="3" name="テキスト プレースホルダー 2">
             <a:extLst>
               <a:ext uri="{FF2B5EF4-FFF2-40B4-BE49-F238E27FC236}">
-                <a16:creationId xmlns:a16="http://schemas.microsoft.com/office/drawing/2014/main" id="{0A8903A4-FBE7-7B75-F12A-D8EFB7178E2E}"/>
+                <a16:creationId xmlns:a16="http://schemas.microsoft.com/office/drawing/2014/main" id="{52D49C41-E7E1-0266-5FA0-F7FC94A3CE3D}"/>
               </a:ext>
             </a:extLst>
           </p:cNvPr>
@@ -3161,7 +3161,7 @@
           <p:cNvPr id="4" name="日付プレースホルダー 3">
             <a:extLst>
               <a:ext uri="{FF2B5EF4-FFF2-40B4-BE49-F238E27FC236}">
-                <a16:creationId xmlns:a16="http://schemas.microsoft.com/office/drawing/2014/main" id="{2DFC3146-70BF-022D-4339-29E4CFA9E4FD}"/>
+                <a16:creationId xmlns:a16="http://schemas.microsoft.com/office/drawing/2014/main" id="{69390D8B-A8B6-89D8-CBDC-95F62F3BD277}"/>
               </a:ext>
             </a:extLst>
           </p:cNvPr>
@@ -3195,7 +3195,7 @@
             </a:lvl1pPr>
           </a:lstStyle>
           <a:p>
-            <a:fld id="{E0067E29-33DB-46FA-A4BF-55C2424EE3F1}" type="datetimeFigureOut">
+            <a:fld id="{A8E3BFF6-5743-4169-BBBD-C8E90BFC3283}" type="datetimeFigureOut">
               <a:rPr kumimoji="1" lang="ja-JP" altLang="en-US" smtClean="0"/>
               <a:t>2026/7/30</a:t>
             </a:fld>
@@ -3208,7 +3208,7 @@
           <p:cNvPr id="5" name="フッター プレースホルダー 4">
             <a:extLst>
               <a:ext uri="{FF2B5EF4-FFF2-40B4-BE49-F238E27FC236}">
-                <a16:creationId xmlns:a16="http://schemas.microsoft.com/office/drawing/2014/main" id="{CCE7DC13-5037-E4DD-8DF8-6009976B78D0}"/>
+                <a16:creationId xmlns:a16="http://schemas.microsoft.com/office/drawing/2014/main" id="{FD222090-CF73-E4B9-2057-0018C7A9F60A}"/>
               </a:ext>
             </a:extLst>
           </p:cNvPr>
@@ -3251,7 +3251,7 @@
           <p:cNvPr id="6" name="スライド番号プレースホルダー 5">
             <a:extLst>
               <a:ext uri="{FF2B5EF4-FFF2-40B4-BE49-F238E27FC236}">
-                <a16:creationId xmlns:a16="http://schemas.microsoft.com/office/drawing/2014/main" id="{8CDA7771-F227-FB84-6B7A-3C90C8F35950}"/>
+                <a16:creationId xmlns:a16="http://schemas.microsoft.com/office/drawing/2014/main" id="{0EADA46D-283F-43D3-67A5-5B1AA39537C6}"/>
               </a:ext>
             </a:extLst>
           </p:cNvPr>
@@ -3285,7 +3285,7 @@
             </a:lvl1pPr>
           </a:lstStyle>
           <a:p>
-            <a:fld id="{C0D520E9-7B49-49BF-B12B-E685C26A66D8}" type="slidenum">
+            <a:fld id="{47D55DD1-BB1D-475B-B8D9-3DEE81C2D692}" type="slidenum">
               <a:rPr kumimoji="1" lang="ja-JP" altLang="en-US" smtClean="0"/>
               <a:t>‹#›</a:t>
             </a:fld>
@@ -3296,7 +3296,7 @@
     </p:spTree>
     <p:extLst>
       <p:ext uri="{BB962C8B-B14F-4D97-AF65-F5344CB8AC3E}">
-        <p14:creationId xmlns:p14="http://schemas.microsoft.com/office/powerpoint/2010/main" val="2128634343"/>
+        <p14:creationId xmlns:p14="http://schemas.microsoft.com/office/powerpoint/2010/main" val="3313056676"/>
       </p:ext>
     </p:extLst>
   </p:cSld>
@@ -3619,7 +3619,7 @@
           <p:cNvPr id="2" name="テキスト ボックス 1">
             <a:extLst>
               <a:ext uri="{FF2B5EF4-FFF2-40B4-BE49-F238E27FC236}">
-                <a16:creationId xmlns:a16="http://schemas.microsoft.com/office/drawing/2014/main" id="{FECB7501-0959-6619-818F-32491E2562BB}"/>
+                <a16:creationId xmlns:a16="http://schemas.microsoft.com/office/drawing/2014/main" id="{5FCE97FB-E07A-59EB-4B82-F4B6F4748345}"/>
               </a:ext>
             </a:extLst>
           </p:cNvPr>
@@ -3665,7 +3665,7 @@
           <p:cNvPr id="3" name="テキスト ボックス 2">
             <a:extLst>
               <a:ext uri="{FF2B5EF4-FFF2-40B4-BE49-F238E27FC236}">
-                <a16:creationId xmlns:a16="http://schemas.microsoft.com/office/drawing/2014/main" id="{9706D88E-4139-3172-8C5B-FD1327C3D4D1}"/>
+                <a16:creationId xmlns:a16="http://schemas.microsoft.com/office/drawing/2014/main" id="{75F4085A-BF01-A342-8D7B-CEF1DE50860D}"/>
               </a:ext>
             </a:extLst>
           </p:cNvPr>
@@ -3714,7 +3714,7 @@
           <p:cNvPr id="4" name="テキスト ボックス 3">
             <a:extLst>
               <a:ext uri="{FF2B5EF4-FFF2-40B4-BE49-F238E27FC236}">
-                <a16:creationId xmlns:a16="http://schemas.microsoft.com/office/drawing/2014/main" id="{2D6C8556-68A6-3678-998B-1E0DB11C3461}"/>
+                <a16:creationId xmlns:a16="http://schemas.microsoft.com/office/drawing/2014/main" id="{81045C1E-565A-520F-3FCD-A31018D300A8}"/>
               </a:ext>
             </a:extLst>
           </p:cNvPr>
@@ -3754,7 +3754,7 @@
           <p:cNvPr id="5" name="テキスト ボックス 4">
             <a:extLst>
               <a:ext uri="{FF2B5EF4-FFF2-40B4-BE49-F238E27FC236}">
-                <a16:creationId xmlns:a16="http://schemas.microsoft.com/office/drawing/2014/main" id="{92210E73-BBCD-5180-9F4E-A8EED24F4C32}"/>
+                <a16:creationId xmlns:a16="http://schemas.microsoft.com/office/drawing/2014/main" id="{AFF5ED48-C34C-1443-7FB7-1E874C3784E8}"/>
               </a:ext>
             </a:extLst>
           </p:cNvPr>
@@ -3801,7 +3801,7 @@
             <a:hlinkClick r:id="" action="ppaction://media"/>
             <a:extLst>
               <a:ext uri="{FF2B5EF4-FFF2-40B4-BE49-F238E27FC236}">
-                <a16:creationId xmlns:a16="http://schemas.microsoft.com/office/drawing/2014/main" id="{99FB41D4-4E02-C2D4-AD3C-BB64BB20BDAC}"/>
+                <a16:creationId xmlns:a16="http://schemas.microsoft.com/office/drawing/2014/main" id="{53C4C7C8-CF35-C396-CC07-830FAFCB6B24}"/>
               </a:ext>
             </a:extLst>
           </p:cNvPr>
@@ -3836,7 +3836,7 @@
     </p:spTree>
     <p:extLst>
       <p:ext uri="{BB962C8B-B14F-4D97-AF65-F5344CB8AC3E}">
-        <p14:creationId xmlns:p14="http://schemas.microsoft.com/office/powerpoint/2010/main" val="719594866"/>
+        <p14:creationId xmlns:p14="http://schemas.microsoft.com/office/powerpoint/2010/main" val="934419311"/>
       </p:ext>
     </p:extLst>
   </p:cSld>
@@ -3960,7 +3960,7 @@
           <p:cNvPr id="2" name="テキスト ボックス 1">
             <a:extLst>
               <a:ext uri="{FF2B5EF4-FFF2-40B4-BE49-F238E27FC236}">
-                <a16:creationId xmlns:a16="http://schemas.microsoft.com/office/drawing/2014/main" id="{A50BE1FB-3E86-E563-A896-50DC1ABEA14F}"/>
+                <a16:creationId xmlns:a16="http://schemas.microsoft.com/office/drawing/2014/main" id="{63CB18FF-FA59-7FD9-95D1-0ECE9683F1CB}"/>
               </a:ext>
             </a:extLst>
           </p:cNvPr>
@@ -4006,7 +4006,7 @@
           <p:cNvPr id="3" name="テキスト ボックス 2">
             <a:extLst>
               <a:ext uri="{FF2B5EF4-FFF2-40B4-BE49-F238E27FC236}">
-                <a16:creationId xmlns:a16="http://schemas.microsoft.com/office/drawing/2014/main" id="{91979F7E-1A80-1BEE-1FC0-4E60479AE8EC}"/>
+                <a16:creationId xmlns:a16="http://schemas.microsoft.com/office/drawing/2014/main" id="{BFE57EDA-18D4-B6BF-C455-F4942B124085}"/>
               </a:ext>
             </a:extLst>
           </p:cNvPr>
@@ -4046,7 +4046,7 @@
           <p:cNvPr id="4" name="テキスト ボックス 3">
             <a:extLst>
               <a:ext uri="{FF2B5EF4-FFF2-40B4-BE49-F238E27FC236}">
-                <a16:creationId xmlns:a16="http://schemas.microsoft.com/office/drawing/2014/main" id="{5973F2B2-09DE-BB73-08DA-D34EA039A9FF}"/>
+                <a16:creationId xmlns:a16="http://schemas.microsoft.com/office/drawing/2014/main" id="{81695BC5-7578-B753-441F-B04A9D2127E6}"/>
               </a:ext>
             </a:extLst>
           </p:cNvPr>
@@ -4076,14 +4076,17 @@
                 </a:solidFill>
                 <a:latin typeface="Arial" panose="020B0604020202020204" pitchFamily="34" charset="0"/>
               </a:rPr>
-              <a:t>vinext starter A clean full stack starter running on vinext https://github</a:t>
-            </a:r>
-            <a:endParaRPr kumimoji="1" lang="ja-JP" altLang="en-US" sz="2000">
-              <a:solidFill>
-                <a:srgbClr val="333333"/>
-              </a:solidFill>
-              <a:latin typeface="Arial" panose="020B0604020202020204" pitchFamily="34" charset="0"/>
-            </a:endParaRPr>
+              <a:t>Vr Content Gear Guide</a:t>
+            </a:r>
+            <a:r>
+              <a:rPr kumimoji="1" lang="ja-JP" altLang="en-US" sz="2000">
+                <a:solidFill>
+                  <a:srgbClr val="333333"/>
+                </a:solidFill>
+                <a:latin typeface="Arial" panose="020B0604020202020204" pitchFamily="34" charset="0"/>
+              </a:rPr>
+              <a:t>の目的、構成、実装を公開コードから確認できるプロジェクトです。</a:t>
+            </a:r>
           </a:p>
         </p:txBody>
       </p:sp>
@@ -4092,7 +4095,7 @@
           <p:cNvPr id="5" name="テキスト ボックス 4">
             <a:extLst>
               <a:ext uri="{FF2B5EF4-FFF2-40B4-BE49-F238E27FC236}">
-                <a16:creationId xmlns:a16="http://schemas.microsoft.com/office/drawing/2014/main" id="{B57289D8-0ED5-8EF4-A392-B09C2F6E2C1D}"/>
+                <a16:creationId xmlns:a16="http://schemas.microsoft.com/office/drawing/2014/main" id="{CA14B367-1847-ED84-581D-F54917D7E063}"/>
               </a:ext>
             </a:extLst>
           </p:cNvPr>
@@ -4139,7 +4142,7 @@
             <a:hlinkClick r:id="" action="ppaction://media"/>
             <a:extLst>
               <a:ext uri="{FF2B5EF4-FFF2-40B4-BE49-F238E27FC236}">
-                <a16:creationId xmlns:a16="http://schemas.microsoft.com/office/drawing/2014/main" id="{F3E81554-9013-5ECB-1358-9A430B38CB32}"/>
+                <a16:creationId xmlns:a16="http://schemas.microsoft.com/office/drawing/2014/main" id="{18878AB1-1D0A-F085-6F09-25D7E3E4B63C}"/>
               </a:ext>
             </a:extLst>
           </p:cNvPr>
@@ -4174,7 +4177,7 @@
     </p:spTree>
     <p:extLst>
       <p:ext uri="{BB962C8B-B14F-4D97-AF65-F5344CB8AC3E}">
-        <p14:creationId xmlns:p14="http://schemas.microsoft.com/office/powerpoint/2010/main" val="1527544086"/>
+        <p14:creationId xmlns:p14="http://schemas.microsoft.com/office/powerpoint/2010/main" val="2739153280"/>
       </p:ext>
     </p:extLst>
   </p:cSld>
@@ -4183,10 +4186,10 @@
   </p:clrMapOvr>
   <mc:AlternateContent xmlns:mc="http://schemas.openxmlformats.org/markup-compatibility/2006">
     <mc:Choice xmlns:p14="http://schemas.microsoft.com/office/powerpoint/2010/main" Requires="p14">
-      <p:transition spd="slow" p14:dur="2000" advTm="8000"/>
+      <p:transition spd="slow" p14:dur="2000" advTm="9000"/>
     </mc:Choice>
     <mc:Fallback>
-      <p:transition spd="slow" advTm="8000"/>
+      <p:transition spd="slow" advTm="9000"/>
     </mc:Fallback>
   </mc:AlternateContent>
   <p:timing>
@@ -4217,7 +4220,7 @@
                                   <p:childTnLst>
                                     <p:cmd type="call" cmd="playFrom(0.0)">
                                       <p:cBhvr>
-                                        <p:cTn id="6" dur="7955" fill="hold"/>
+                                        <p:cTn id="6" dur="8036" fill="hold"/>
                                         <p:tgtEl>
                                           <p:spTgt spid="6"/>
                                         </p:tgtEl>
@@ -4298,7 +4301,7 @@
           <p:cNvPr id="2" name="テキスト ボックス 1">
             <a:extLst>
               <a:ext uri="{FF2B5EF4-FFF2-40B4-BE49-F238E27FC236}">
-                <a16:creationId xmlns:a16="http://schemas.microsoft.com/office/drawing/2014/main" id="{6ACEBE90-19B2-D771-E424-3CF6DDB8D7D3}"/>
+                <a16:creationId xmlns:a16="http://schemas.microsoft.com/office/drawing/2014/main" id="{5A29F730-2055-1D84-DDC3-89CE866E0EBF}"/>
               </a:ext>
             </a:extLst>
           </p:cNvPr>
@@ -4344,7 +4347,7 @@
           <p:cNvPr id="3" name="テキスト ボックス 2">
             <a:extLst>
               <a:ext uri="{FF2B5EF4-FFF2-40B4-BE49-F238E27FC236}">
-                <a16:creationId xmlns:a16="http://schemas.microsoft.com/office/drawing/2014/main" id="{A79B1888-E9D0-D8DD-D579-8FE21F916210}"/>
+                <a16:creationId xmlns:a16="http://schemas.microsoft.com/office/drawing/2014/main" id="{40779B4A-D721-BDB7-5C69-B940CC5C881B}"/>
               </a:ext>
             </a:extLst>
           </p:cNvPr>
@@ -4384,7 +4387,7 @@
           <p:cNvPr id="4" name="テキスト ボックス 3">
             <a:extLst>
               <a:ext uri="{FF2B5EF4-FFF2-40B4-BE49-F238E27FC236}">
-                <a16:creationId xmlns:a16="http://schemas.microsoft.com/office/drawing/2014/main" id="{FA04F892-2E61-2D0A-8589-D9A5F1F8BF72}"/>
+                <a16:creationId xmlns:a16="http://schemas.microsoft.com/office/drawing/2014/main" id="{B1B2526C-A6C7-52A6-4790-B8F9F6B855AA}"/>
               </a:ext>
             </a:extLst>
           </p:cNvPr>
@@ -4461,7 +4464,7 @@
           <p:cNvPr id="5" name="テキスト ボックス 4">
             <a:extLst>
               <a:ext uri="{FF2B5EF4-FFF2-40B4-BE49-F238E27FC236}">
-                <a16:creationId xmlns:a16="http://schemas.microsoft.com/office/drawing/2014/main" id="{C0BFA554-D9F4-4E9E-7605-1711A61DA99C}"/>
+                <a16:creationId xmlns:a16="http://schemas.microsoft.com/office/drawing/2014/main" id="{282358F5-EAC4-3106-85D6-5896E370D30B}"/>
               </a:ext>
             </a:extLst>
           </p:cNvPr>
@@ -4508,7 +4511,7 @@
             <a:hlinkClick r:id="" action="ppaction://media"/>
             <a:extLst>
               <a:ext uri="{FF2B5EF4-FFF2-40B4-BE49-F238E27FC236}">
-                <a16:creationId xmlns:a16="http://schemas.microsoft.com/office/drawing/2014/main" id="{57CDF1B2-7494-B6D6-16CE-353E4B42386D}"/>
+                <a16:creationId xmlns:a16="http://schemas.microsoft.com/office/drawing/2014/main" id="{0E4F6FAB-BA7F-AC7C-1062-862C4B8849BF}"/>
               </a:ext>
             </a:extLst>
           </p:cNvPr>
@@ -4543,7 +4546,7 @@
     </p:spTree>
     <p:extLst>
       <p:ext uri="{BB962C8B-B14F-4D97-AF65-F5344CB8AC3E}">
-        <p14:creationId xmlns:p14="http://schemas.microsoft.com/office/powerpoint/2010/main" val="172935971"/>
+        <p14:creationId xmlns:p14="http://schemas.microsoft.com/office/powerpoint/2010/main" val="4043282690"/>
       </p:ext>
     </p:extLst>
   </p:cSld>
@@ -4667,7 +4670,7 @@
           <p:cNvPr id="2" name="テキスト ボックス 1">
             <a:extLst>
               <a:ext uri="{FF2B5EF4-FFF2-40B4-BE49-F238E27FC236}">
-                <a16:creationId xmlns:a16="http://schemas.microsoft.com/office/drawing/2014/main" id="{CDDAA70D-B269-94FB-4588-1662649DD7F1}"/>
+                <a16:creationId xmlns:a16="http://schemas.microsoft.com/office/drawing/2014/main" id="{385A64C6-9A2D-9541-90AC-5BF12F0D87CA}"/>
               </a:ext>
             </a:extLst>
           </p:cNvPr>
@@ -4713,7 +4716,7 @@
           <p:cNvPr id="3" name="テキスト ボックス 2">
             <a:extLst>
               <a:ext uri="{FF2B5EF4-FFF2-40B4-BE49-F238E27FC236}">
-                <a16:creationId xmlns:a16="http://schemas.microsoft.com/office/drawing/2014/main" id="{17509334-2286-F743-506E-96F73FE08FA1}"/>
+                <a16:creationId xmlns:a16="http://schemas.microsoft.com/office/drawing/2014/main" id="{9CD29DDE-36C5-F82F-BF95-AFA07505E449}"/>
               </a:ext>
             </a:extLst>
           </p:cNvPr>
@@ -4753,7 +4756,7 @@
           <p:cNvPr id="4" name="テキスト ボックス 3">
             <a:extLst>
               <a:ext uri="{FF2B5EF4-FFF2-40B4-BE49-F238E27FC236}">
-                <a16:creationId xmlns:a16="http://schemas.microsoft.com/office/drawing/2014/main" id="{62B32CE7-E1FD-AD84-E372-AC5FCDA92AE0}"/>
+                <a16:creationId xmlns:a16="http://schemas.microsoft.com/office/drawing/2014/main" id="{BAEA545E-06CC-C354-1E91-ED1BEB925442}"/>
               </a:ext>
             </a:extLst>
           </p:cNvPr>
@@ -4863,7 +4866,7 @@
           <p:cNvPr id="5" name="テキスト ボックス 4">
             <a:extLst>
               <a:ext uri="{FF2B5EF4-FFF2-40B4-BE49-F238E27FC236}">
-                <a16:creationId xmlns:a16="http://schemas.microsoft.com/office/drawing/2014/main" id="{FD684964-DACE-C26E-AD3D-3F08E0F8B0F3}"/>
+                <a16:creationId xmlns:a16="http://schemas.microsoft.com/office/drawing/2014/main" id="{61AD47A4-D9DC-E873-15FD-3FA05A8C1B0C}"/>
               </a:ext>
             </a:extLst>
           </p:cNvPr>
@@ -4910,7 +4913,7 @@
             <a:hlinkClick r:id="" action="ppaction://media"/>
             <a:extLst>
               <a:ext uri="{FF2B5EF4-FFF2-40B4-BE49-F238E27FC236}">
-                <a16:creationId xmlns:a16="http://schemas.microsoft.com/office/drawing/2014/main" id="{1B082470-DB5B-9A17-D261-12F4537483CB}"/>
+                <a16:creationId xmlns:a16="http://schemas.microsoft.com/office/drawing/2014/main" id="{281B49C0-E7C1-7363-B681-B45597A68363}"/>
               </a:ext>
             </a:extLst>
           </p:cNvPr>
@@ -4945,7 +4948,7 @@
     </p:spTree>
     <p:extLst>
       <p:ext uri="{BB962C8B-B14F-4D97-AF65-F5344CB8AC3E}">
-        <p14:creationId xmlns:p14="http://schemas.microsoft.com/office/powerpoint/2010/main" val="2964673208"/>
+        <p14:creationId xmlns:p14="http://schemas.microsoft.com/office/powerpoint/2010/main" val="3757991102"/>
       </p:ext>
     </p:extLst>
   </p:cSld>
@@ -5069,7 +5072,7 @@
           <p:cNvPr id="2" name="テキスト ボックス 1">
             <a:extLst>
               <a:ext uri="{FF2B5EF4-FFF2-40B4-BE49-F238E27FC236}">
-                <a16:creationId xmlns:a16="http://schemas.microsoft.com/office/drawing/2014/main" id="{3209816E-2186-CC61-B028-5D2DB02A724E}"/>
+                <a16:creationId xmlns:a16="http://schemas.microsoft.com/office/drawing/2014/main" id="{77FCDFB7-AD57-BAF9-8426-BC7694C69A0F}"/>
               </a:ext>
             </a:extLst>
           </p:cNvPr>
@@ -5115,7 +5118,7 @@
           <p:cNvPr id="3" name="テキスト ボックス 2">
             <a:extLst>
               <a:ext uri="{FF2B5EF4-FFF2-40B4-BE49-F238E27FC236}">
-                <a16:creationId xmlns:a16="http://schemas.microsoft.com/office/drawing/2014/main" id="{EC6D5B5A-C537-7F78-FB03-8768B1490974}"/>
+                <a16:creationId xmlns:a16="http://schemas.microsoft.com/office/drawing/2014/main" id="{D7C21FE3-D8BB-C839-6604-83183E360890}"/>
               </a:ext>
             </a:extLst>
           </p:cNvPr>
@@ -5155,7 +5158,7 @@
           <p:cNvPr id="4" name="テキスト ボックス 3">
             <a:extLst>
               <a:ext uri="{FF2B5EF4-FFF2-40B4-BE49-F238E27FC236}">
-                <a16:creationId xmlns:a16="http://schemas.microsoft.com/office/drawing/2014/main" id="{E1EFAAA5-C12E-548E-0B20-7C70393B680D}"/>
+                <a16:creationId xmlns:a16="http://schemas.microsoft.com/office/drawing/2014/main" id="{685E78DC-E703-9970-7CE0-B854D0D86EBF}"/>
               </a:ext>
             </a:extLst>
           </p:cNvPr>
@@ -5179,20 +5182,14 @@
           <a:lstStyle/>
           <a:p>
             <a:r>
-              <a:rPr kumimoji="1" lang="en-US" altLang="ja-JP" sz="2000">
+              <a:rPr kumimoji="1" lang="ja-JP" altLang="en-US" sz="2000">
                 <a:solidFill>
                   <a:srgbClr val="333333"/>
                 </a:solidFill>
                 <a:latin typeface="Arial" panose="020B0604020202020204" pitchFamily="34" charset="0"/>
               </a:rPr>
-              <a:t>Configure Sites project</a:t>
-            </a:r>
-            <a:endParaRPr kumimoji="1" lang="ja-JP" altLang="en-US" sz="2000">
-              <a:solidFill>
-                <a:srgbClr val="333333"/>
-              </a:solidFill>
-              <a:latin typeface="Arial" panose="020B0604020202020204" pitchFamily="34" charset="0"/>
-            </a:endParaRPr>
+              <a:t>直近のコミットでは、実装の見直しと継続的な改善が行われました。</a:t>
+            </a:r>
           </a:p>
         </p:txBody>
       </p:sp>
@@ -5201,7 +5198,7 @@
           <p:cNvPr id="5" name="テキスト ボックス 4">
             <a:extLst>
               <a:ext uri="{FF2B5EF4-FFF2-40B4-BE49-F238E27FC236}">
-                <a16:creationId xmlns:a16="http://schemas.microsoft.com/office/drawing/2014/main" id="{B4BD06EF-E48D-B8D2-C453-3E8DA6FD1A01}"/>
+                <a16:creationId xmlns:a16="http://schemas.microsoft.com/office/drawing/2014/main" id="{560EF13B-66D5-EFA9-9646-799376E58A41}"/>
               </a:ext>
             </a:extLst>
           </p:cNvPr>
@@ -5248,7 +5245,7 @@
             <a:hlinkClick r:id="" action="ppaction://media"/>
             <a:extLst>
               <a:ext uri="{FF2B5EF4-FFF2-40B4-BE49-F238E27FC236}">
-                <a16:creationId xmlns:a16="http://schemas.microsoft.com/office/drawing/2014/main" id="{2BC2F8E6-FEBF-FD4D-6541-CCAC8DFFEFF3}"/>
+                <a16:creationId xmlns:a16="http://schemas.microsoft.com/office/drawing/2014/main" id="{89448F72-8D7F-529B-B774-2A567B1396C5}"/>
               </a:ext>
             </a:extLst>
           </p:cNvPr>
@@ -5283,7 +5280,7 @@
     </p:spTree>
     <p:extLst>
       <p:ext uri="{BB962C8B-B14F-4D97-AF65-F5344CB8AC3E}">
-        <p14:creationId xmlns:p14="http://schemas.microsoft.com/office/powerpoint/2010/main" val="2325740009"/>
+        <p14:creationId xmlns:p14="http://schemas.microsoft.com/office/powerpoint/2010/main" val="920278733"/>
       </p:ext>
     </p:extLst>
   </p:cSld>
@@ -5292,10 +5289,10 @@
   </p:clrMapOvr>
   <mc:AlternateContent xmlns:mc="http://schemas.openxmlformats.org/markup-compatibility/2006">
     <mc:Choice xmlns:p14="http://schemas.microsoft.com/office/powerpoint/2010/main" Requires="p14">
-      <p:transition spd="slow" p14:dur="2000" advTm="6000"/>
+      <p:transition spd="slow" p14:dur="2000" advTm="7000"/>
     </mc:Choice>
     <mc:Fallback>
-      <p:transition spd="slow" advTm="6000"/>
+      <p:transition spd="slow" advTm="7000"/>
     </mc:Fallback>
   </mc:AlternateContent>
   <p:timing>
@@ -5326,7 +5323,7 @@
                                   <p:childTnLst>
                                     <p:cmd type="call" cmd="playFrom(0.0)">
                                       <p:cBhvr>
-                                        <p:cTn id="6" dur="5997" fill="hold"/>
+                                        <p:cTn id="6" dur="6076" fill="hold"/>
                                         <p:tgtEl>
                                           <p:spTgt spid="6"/>
                                         </p:tgtEl>
@@ -5407,7 +5404,7 @@
           <p:cNvPr id="2" name="テキスト ボックス 1">
             <a:extLst>
               <a:ext uri="{FF2B5EF4-FFF2-40B4-BE49-F238E27FC236}">
-                <a16:creationId xmlns:a16="http://schemas.microsoft.com/office/drawing/2014/main" id="{0B654A4F-E42B-4174-3289-C0758E44CA85}"/>
+                <a16:creationId xmlns:a16="http://schemas.microsoft.com/office/drawing/2014/main" id="{881050F0-D050-C667-70C9-F5BD3631A02A}"/>
               </a:ext>
             </a:extLst>
           </p:cNvPr>
@@ -5453,7 +5450,7 @@
           <p:cNvPr id="3" name="テキスト ボックス 2">
             <a:extLst>
               <a:ext uri="{FF2B5EF4-FFF2-40B4-BE49-F238E27FC236}">
-                <a16:creationId xmlns:a16="http://schemas.microsoft.com/office/drawing/2014/main" id="{09B47F44-1287-E6D7-443A-76CF353286EA}"/>
+                <a16:creationId xmlns:a16="http://schemas.microsoft.com/office/drawing/2014/main" id="{C89D569C-1341-7FEE-D50D-7B79377BE4A9}"/>
               </a:ext>
             </a:extLst>
           </p:cNvPr>
@@ -5493,7 +5490,7 @@
           <p:cNvPr id="4" name="テキスト ボックス 3">
             <a:extLst>
               <a:ext uri="{FF2B5EF4-FFF2-40B4-BE49-F238E27FC236}">
-                <a16:creationId xmlns:a16="http://schemas.microsoft.com/office/drawing/2014/main" id="{32015A7C-77DA-4A6C-1AF5-D525DCF349D4}"/>
+                <a16:creationId xmlns:a16="http://schemas.microsoft.com/office/drawing/2014/main" id="{5E71BBFF-328A-D5BD-3C38-C569E1555EDA}"/>
               </a:ext>
             </a:extLst>
           </p:cNvPr>
@@ -5558,7 +5555,7 @@
           <p:cNvPr id="5" name="テキスト ボックス 4">
             <a:extLst>
               <a:ext uri="{FF2B5EF4-FFF2-40B4-BE49-F238E27FC236}">
-                <a16:creationId xmlns:a16="http://schemas.microsoft.com/office/drawing/2014/main" id="{4C4A8569-1B10-6817-E5D4-9DD34662B7F8}"/>
+                <a16:creationId xmlns:a16="http://schemas.microsoft.com/office/drawing/2014/main" id="{88D45E9A-4706-294C-7E39-A16813EDC185}"/>
               </a:ext>
             </a:extLst>
           </p:cNvPr>
@@ -5605,7 +5602,7 @@
             <a:hlinkClick r:id="" action="ppaction://media"/>
             <a:extLst>
               <a:ext uri="{FF2B5EF4-FFF2-40B4-BE49-F238E27FC236}">
-                <a16:creationId xmlns:a16="http://schemas.microsoft.com/office/drawing/2014/main" id="{3C7217EC-4829-E67F-5A48-FEB10054123C}"/>
+                <a16:creationId xmlns:a16="http://schemas.microsoft.com/office/drawing/2014/main" id="{A1B25333-7067-7E4A-FC6C-DDEB192A00AA}"/>
               </a:ext>
             </a:extLst>
           </p:cNvPr>
@@ -5640,7 +5637,7 @@
     </p:spTree>
     <p:extLst>
       <p:ext uri="{BB962C8B-B14F-4D97-AF65-F5344CB8AC3E}">
-        <p14:creationId xmlns:p14="http://schemas.microsoft.com/office/powerpoint/2010/main" val="3284128346"/>
+        <p14:creationId xmlns:p14="http://schemas.microsoft.com/office/powerpoint/2010/main" val="2739206364"/>
       </p:ext>
     </p:extLst>
   </p:cSld>
